--- a/Kong & Head Pro Grammer Presentation/Portfolio Kongkidakorn Chuayjang.pptx
+++ b/Kong & Head Pro Grammer Presentation/Portfolio Kongkidakorn Chuayjang.pptx
@@ -19,6 +19,8 @@
     <p:sldId id="264" r:id="rId13"/>
     <p:sldId id="265" r:id="rId14"/>
     <p:sldId id="266" r:id="rId15"/>
+    <p:sldId id="270" r:id="rId21"/>
+    <p:sldId id="271" r:id="rId22"/>
     <p:sldId id="267" r:id="rId16"/>
     <p:sldId id="268" r:id="rId17"/>
     <p:sldId id="269" r:id="rId18"/>
@@ -2380,12 +2382,12 @@
 </p:notes>
 </file>
 
-<file path=ppt/notesSlides/notesSlide2.xml><?xml version="1.0" encoding="utf-8"?>
+<file path=ppt/notesSlides/notesSlide15.xml><?xml version="1.0" encoding="utf-8"?>
 <p:notes xmlns:a="http://schemas.openxmlformats.org/drawingml/2006/main" xmlns:r="http://schemas.openxmlformats.org/officeDocument/2006/relationships" xmlns:mc="http://schemas.openxmlformats.org/markup-compatibility/2006" xmlns:mv="urn:schemas-microsoft-com:mac:vml" xmlns:p="http://schemas.openxmlformats.org/presentationml/2006/main" xmlns:c="http://schemas.openxmlformats.org/drawingml/2006/chart" xmlns:dgm="http://schemas.openxmlformats.org/drawingml/2006/diagram" xmlns:o="urn:schemas-microsoft-com:office:office" xmlns:v="urn:schemas-microsoft-com:vml" xmlns:pvml="urn:schemas-microsoft-com:office:powerpoint" xmlns:com="http://schemas.openxmlformats.org/drawingml/2006/compatibility" xmlns:p14="http://schemas.microsoft.com/office/powerpoint/2010/main" xmlns:p15="http://schemas.microsoft.com/office/powerpoint/2012/main" xmlns:ahyp="http://schemas.microsoft.com/office/drawing/2018/hyperlinkcolor" showMasterPhAnim="0" showMasterSp="0">
   <p:cSld>
     <p:spTree>
       <p:nvGrpSpPr>
-        <p:cNvPr id="20" name="Shape 20"/>
+        <p:cNvPr id="116" name="Shape 116"/>
         <p:cNvGrpSpPr/>
         <p:nvPr/>
       </p:nvGrpSpPr>
@@ -2399,7 +2401,7 @@
       </p:grpSpPr>
       <p:sp>
         <p:nvSpPr>
-          <p:cNvPr id="21" name="Google Shape;21;p2:notes"/>
+          <p:cNvPr id="117" name="Google Shape;117;p6:notes"/>
           <p:cNvSpPr/>
           <p:nvPr>
             <p:ph idx="2" type="sldImg"/>
@@ -2444,6 +2446,322 @@
       </p:sp>
       <p:sp>
         <p:nvSpPr>
+          <p:cNvPr id="118" name="Google Shape;118;p6:notes"/>
+          <p:cNvSpPr txBox="1"/>
+          <p:nvPr>
+            <p:ph idx="1" type="body"/>
+          </p:nvPr>
+        </p:nvSpPr>
+        <p:spPr>
+          <a:xfrm>
+            <a:off x="685800" y="4400550"/>
+            <a:ext cx="5486400" cy="3600450"/>
+          </a:xfrm>
+          <a:prstGeom prst="rect">
+            <a:avLst/>
+          </a:prstGeom>
+          <a:noFill/>
+          <a:ln>
+            <a:noFill/>
+          </a:ln>
+        </p:spPr>
+        <p:txBody>
+          <a:bodyPr anchorCtr="0" anchor="t" bIns="45700" lIns="91425" spcFirstLastPara="1" rIns="91425" wrap="square" tIns="45700">
+            <a:noAutofit/>
+          </a:bodyPr>
+          <a:lstStyle/>
+          <a:p>
+            <a:pPr indent="0" lvl="0" marL="0" rtl="0" algn="l">
+              <a:spcBef>
+                <a:spcPts val="0"/>
+              </a:spcBef>
+              <a:spcAft>
+                <a:spcPts val="0"/>
+              </a:spcAft>
+              <a:buNone/>
+            </a:pPr>
+            <a:r>
+              <a:rPr lang="en-US"/>
+              <a:t>สัปดาห์ที่ 5 ทำให้เกมเล่นออนไลน์ได้ครบตั้งแต่เปิดเกม เน้นว่าเมนู Esc ไม่หยุดเกม เพราะเป็นเกมออนไลน์</a:t>
+            </a:r>
+            <a:endParaRPr/>
+          </a:p>
+        </p:txBody>
+      </p:sp>
+      <p:sp>
+        <p:nvSpPr>
+          <p:cNvPr id="119" name="Google Shape;119;p6:notes"/>
+          <p:cNvSpPr txBox="1"/>
+          <p:nvPr>
+            <p:ph idx="12" type="sldNum"/>
+          </p:nvPr>
+        </p:nvSpPr>
+        <p:spPr>
+          <a:xfrm>
+            <a:off x="3884613" y="8685213"/>
+            <a:ext cx="2971800" cy="458787"/>
+          </a:xfrm>
+          <a:prstGeom prst="rect">
+            <a:avLst/>
+          </a:prstGeom>
+          <a:noFill/>
+          <a:ln>
+            <a:noFill/>
+          </a:ln>
+        </p:spPr>
+        <p:txBody>
+          <a:bodyPr anchorCtr="0" anchor="b" bIns="45700" lIns="91425" spcFirstLastPara="1" rIns="91425" wrap="square" tIns="45700">
+            <a:noAutofit/>
+          </a:bodyPr>
+          <a:lstStyle/>
+          <a:p>
+            <a:pPr indent="0" lvl="0" marL="0" rtl="0" algn="r">
+              <a:spcBef>
+                <a:spcPts val="0"/>
+              </a:spcBef>
+              <a:spcAft>
+                <a:spcPts val="0"/>
+              </a:spcAft>
+              <a:buNone/>
+            </a:pPr>
+            <a:fld id="{00000000-1234-1234-1234-123412341234}" type="slidenum">
+              <a:rPr lang="en-US"/>
+              <a:t>‹#›</a:t>
+            </a:fld>
+            <a:endParaRPr/>
+          </a:p>
+        </p:txBody>
+      </p:sp>
+    </p:spTree>
+  </p:cSld>
+  <p:clrMapOvr>
+    <a:masterClrMapping/>
+  </p:clrMapOvr>
+</p:notes>
+</file>
+
+<file path=ppt/notesSlides/notesSlide16.xml><?xml version="1.0" encoding="utf-8"?>
+<p:notes xmlns:a="http://schemas.openxmlformats.org/drawingml/2006/main" xmlns:r="http://schemas.openxmlformats.org/officeDocument/2006/relationships" xmlns:mc="http://schemas.openxmlformats.org/markup-compatibility/2006" xmlns:mv="urn:schemas-microsoft-com:mac:vml" xmlns:p="http://schemas.openxmlformats.org/presentationml/2006/main" xmlns:c="http://schemas.openxmlformats.org/drawingml/2006/chart" xmlns:dgm="http://schemas.openxmlformats.org/drawingml/2006/diagram" xmlns:o="urn:schemas-microsoft-com:office:office" xmlns:v="urn:schemas-microsoft-com:vml" xmlns:pvml="urn:schemas-microsoft-com:office:powerpoint" xmlns:com="http://schemas.openxmlformats.org/drawingml/2006/compatibility" xmlns:p14="http://schemas.microsoft.com/office/powerpoint/2010/main" xmlns:p15="http://schemas.microsoft.com/office/powerpoint/2012/main" xmlns:ahyp="http://schemas.microsoft.com/office/drawing/2018/hyperlinkcolor" showMasterPhAnim="0" showMasterSp="0">
+  <p:cSld>
+    <p:spTree>
+      <p:nvGrpSpPr>
+        <p:cNvPr id="155" name="Shape 155"/>
+        <p:cNvGrpSpPr/>
+        <p:nvPr/>
+      </p:nvGrpSpPr>
+      <p:grpSpPr>
+        <a:xfrm>
+          <a:off x="0" y="0"/>
+          <a:ext cx="0" cy="0"/>
+          <a:chOff x="0" y="0"/>
+          <a:chExt cx="0" cy="0"/>
+        </a:xfrm>
+      </p:grpSpPr>
+      <p:sp>
+        <p:nvSpPr>
+          <p:cNvPr id="156" name="Google Shape;156;p8:notes"/>
+          <p:cNvSpPr/>
+          <p:nvPr>
+            <p:ph idx="2" type="sldImg"/>
+          </p:nvPr>
+        </p:nvSpPr>
+        <p:spPr>
+          <a:xfrm>
+            <a:off x="685800" y="1143000"/>
+            <a:ext cx="5486400" cy="3086100"/>
+          </a:xfrm>
+          <a:custGeom>
+            <a:rect b="b" l="l" r="r" t="t"/>
+            <a:pathLst>
+              <a:path extrusionOk="0" h="120000" w="120000">
+                <a:moveTo>
+                  <a:pt x="0" y="0"/>
+                </a:moveTo>
+                <a:lnTo>
+                  <a:pt x="120000" y="0"/>
+                </a:lnTo>
+                <a:lnTo>
+                  <a:pt x="120000" y="120000"/>
+                </a:lnTo>
+                <a:lnTo>
+                  <a:pt x="0" y="120000"/>
+                </a:lnTo>
+                <a:close/>
+              </a:path>
+            </a:pathLst>
+          </a:custGeom>
+          <a:noFill/>
+          <a:ln cap="flat" cmpd="sng" w="12700">
+            <a:solidFill>
+              <a:srgbClr val="000000"/>
+            </a:solidFill>
+            <a:prstDash val="solid"/>
+            <a:round/>
+            <a:headEnd len="sm" w="sm" type="none"/>
+            <a:tailEnd len="sm" w="sm" type="none"/>
+          </a:ln>
+        </p:spPr>
+      </p:sp>
+      <p:sp>
+        <p:nvSpPr>
+          <p:cNvPr id="157" name="Google Shape;157;p8:notes"/>
+          <p:cNvSpPr txBox="1"/>
+          <p:nvPr>
+            <p:ph idx="1" type="body"/>
+          </p:nvPr>
+        </p:nvSpPr>
+        <p:spPr>
+          <a:xfrm>
+            <a:off x="685800" y="4400550"/>
+            <a:ext cx="5486400" cy="3600450"/>
+          </a:xfrm>
+          <a:prstGeom prst="rect">
+            <a:avLst/>
+          </a:prstGeom>
+          <a:noFill/>
+          <a:ln>
+            <a:noFill/>
+          </a:ln>
+        </p:spPr>
+        <p:txBody>
+          <a:bodyPr anchorCtr="0" anchor="t" bIns="45700" lIns="91425" spcFirstLastPara="1" rIns="91425" wrap="square" tIns="45700">
+            <a:noAutofit/>
+          </a:bodyPr>
+          <a:lstStyle/>
+          <a:p>
+            <a:pPr indent="0" lvl="0" marL="0" rtl="0" algn="l">
+              <a:spcBef>
+                <a:spcPts val="0"/>
+              </a:spcBef>
+              <a:spcAft>
+                <a:spcPts val="0"/>
+              </a:spcAft>
+              <a:buNone/>
+            </a:pPr>
+            <a:r>
+              <a:rPr lang="en-US"/>
+              <a:t>จุดขายคือ เจอว่า SDK ส่งเสียงให้ตัวเกมไม่ได้ เลยเปลี่ยนมาส่งผ่าน Mirror เอง ซึ่งทำให้ได้ทั้งเสียง 3D และวิทยุ</a:t>
+            </a:r>
+            <a:endParaRPr/>
+          </a:p>
+        </p:txBody>
+      </p:sp>
+      <p:sp>
+        <p:nvSpPr>
+          <p:cNvPr id="158" name="Google Shape;158;p8:notes"/>
+          <p:cNvSpPr txBox="1"/>
+          <p:nvPr>
+            <p:ph idx="12" type="sldNum"/>
+          </p:nvPr>
+        </p:nvSpPr>
+        <p:spPr>
+          <a:xfrm>
+            <a:off x="3884613" y="8685213"/>
+            <a:ext cx="2971800" cy="458787"/>
+          </a:xfrm>
+          <a:prstGeom prst="rect">
+            <a:avLst/>
+          </a:prstGeom>
+          <a:noFill/>
+          <a:ln>
+            <a:noFill/>
+          </a:ln>
+        </p:spPr>
+        <p:txBody>
+          <a:bodyPr anchorCtr="0" anchor="b" bIns="45700" lIns="91425" spcFirstLastPara="1" rIns="91425" wrap="square" tIns="45700">
+            <a:noAutofit/>
+          </a:bodyPr>
+          <a:lstStyle/>
+          <a:p>
+            <a:pPr indent="0" lvl="0" marL="0" rtl="0" algn="r">
+              <a:spcBef>
+                <a:spcPts val="0"/>
+              </a:spcBef>
+              <a:spcAft>
+                <a:spcPts val="0"/>
+              </a:spcAft>
+              <a:buNone/>
+            </a:pPr>
+            <a:fld id="{00000000-1234-1234-1234-123412341234}" type="slidenum">
+              <a:rPr lang="en-US"/>
+              <a:t>‹#›</a:t>
+            </a:fld>
+            <a:endParaRPr/>
+          </a:p>
+        </p:txBody>
+      </p:sp>
+    </p:spTree>
+  </p:cSld>
+  <p:clrMapOvr>
+    <a:masterClrMapping/>
+  </p:clrMapOvr>
+</p:notes>
+</file>
+
+<file path=ppt/notesSlides/notesSlide2.xml><?xml version="1.0" encoding="utf-8"?>
+<p:notes xmlns:a="http://schemas.openxmlformats.org/drawingml/2006/main" xmlns:r="http://schemas.openxmlformats.org/officeDocument/2006/relationships" xmlns:mc="http://schemas.openxmlformats.org/markup-compatibility/2006" xmlns:mv="urn:schemas-microsoft-com:mac:vml" xmlns:p="http://schemas.openxmlformats.org/presentationml/2006/main" xmlns:c="http://schemas.openxmlformats.org/drawingml/2006/chart" xmlns:dgm="http://schemas.openxmlformats.org/drawingml/2006/diagram" xmlns:o="urn:schemas-microsoft-com:office:office" xmlns:v="urn:schemas-microsoft-com:vml" xmlns:pvml="urn:schemas-microsoft-com:office:powerpoint" xmlns:com="http://schemas.openxmlformats.org/drawingml/2006/compatibility" xmlns:p14="http://schemas.microsoft.com/office/powerpoint/2010/main" xmlns:p15="http://schemas.microsoft.com/office/powerpoint/2012/main" xmlns:ahyp="http://schemas.microsoft.com/office/drawing/2018/hyperlinkcolor" showMasterPhAnim="0" showMasterSp="0">
+  <p:cSld>
+    <p:spTree>
+      <p:nvGrpSpPr>
+        <p:cNvPr id="20" name="Shape 20"/>
+        <p:cNvGrpSpPr/>
+        <p:nvPr/>
+      </p:nvGrpSpPr>
+      <p:grpSpPr>
+        <a:xfrm>
+          <a:off x="0" y="0"/>
+          <a:ext cx="0" cy="0"/>
+          <a:chOff x="0" y="0"/>
+          <a:chExt cx="0" cy="0"/>
+        </a:xfrm>
+      </p:grpSpPr>
+      <p:sp>
+        <p:nvSpPr>
+          <p:cNvPr id="21" name="Google Shape;21;p2:notes"/>
+          <p:cNvSpPr/>
+          <p:nvPr>
+            <p:ph idx="2" type="sldImg"/>
+          </p:nvPr>
+        </p:nvSpPr>
+        <p:spPr>
+          <a:xfrm>
+            <a:off x="685800" y="1143000"/>
+            <a:ext cx="5486400" cy="3086100"/>
+          </a:xfrm>
+          <a:custGeom>
+            <a:rect b="b" l="l" r="r" t="t"/>
+            <a:pathLst>
+              <a:path extrusionOk="0" h="120000" w="120000">
+                <a:moveTo>
+                  <a:pt x="0" y="0"/>
+                </a:moveTo>
+                <a:lnTo>
+                  <a:pt x="120000" y="0"/>
+                </a:lnTo>
+                <a:lnTo>
+                  <a:pt x="120000" y="120000"/>
+                </a:lnTo>
+                <a:lnTo>
+                  <a:pt x="0" y="120000"/>
+                </a:lnTo>
+                <a:close/>
+              </a:path>
+            </a:pathLst>
+          </a:custGeom>
+          <a:noFill/>
+          <a:ln cap="flat" cmpd="sng" w="12700">
+            <a:solidFill>
+              <a:srgbClr val="000000"/>
+            </a:solidFill>
+            <a:prstDash val="solid"/>
+            <a:round/>
+            <a:headEnd len="sm" w="sm" type="none"/>
+            <a:tailEnd len="sm" w="sm" type="none"/>
+          </a:ln>
+        </p:spPr>
+      </p:sp>
+      <p:sp>
+        <p:nvSpPr>
           <p:cNvPr id="22" name="Google Shape;22;p2:notes"/>
           <p:cNvSpPr txBox="1"/>
           <p:nvPr>
@@ -2480,7 +2798,7 @@
             </a:pPr>
             <a:r>
               <a:rPr lang="en-US"/>
-              <a:t>ใช้สไลด์นี้เปิด ถ้าเวลาน้อยให้พูดแค่ห้าข้อนี้พอ</a:t>
+              <a:t>ใช้สไลด์นี้เปิด ถ้าเวลาน้อยให้พูดแค่เจ็ดข้อนี้พอ</a:t>
             </a:r>
             <a:endParaRPr/>
           </a:p>
@@ -4591,7 +4909,7 @@
                 <a:cs typeface="Tahoma"/>
                 <a:sym typeface="Tahoma"/>
               </a:rPr>
-              <a:t>สัปดาห์ที่ 1 – 4  ·  12 สิงหาคม – 19 กันยายน 2026</a:t>
+              <a:t>สัปดาห์ที่ 1 – 5  ·  12 สิงหาคม – 27 กันยายน 2026</a:t>
             </a:r>
             <a:endParaRPr b="0" i="0" sz="1500" u="none" cap="none" strike="noStrike">
               <a:solidFill>
@@ -7979,8 +8297,8 @@
         </p:nvSpPr>
         <p:spPr>
           <a:xfrm>
-            <a:off x="457200" y="1755648"/>
-            <a:ext cx="11155680" cy="676656"/>
+            <a:off x="457200" y="1691640"/>
+            <a:ext cx="11155680" cy="512064"/>
           </a:xfrm>
           <a:prstGeom prst="roundRect">
             <a:avLst>
@@ -8030,7 +8348,7 @@
         </p:nvSpPr>
         <p:spPr>
           <a:xfrm>
-            <a:off x="685800" y="1883664"/>
+            <a:off x="685800" y="1755648"/>
             <a:ext cx="384048" cy="384048"/>
           </a:xfrm>
           <a:prstGeom prst="ellipse">
@@ -8079,7 +8397,7 @@
         </p:nvSpPr>
         <p:spPr>
           <a:xfrm>
-            <a:off x="685800" y="1883664"/>
+            <a:off x="685800" y="1755648"/>
             <a:ext cx="384048" cy="384048"/>
           </a:xfrm>
           <a:prstGeom prst="rect">
@@ -8142,8 +8460,8 @@
         </p:nvSpPr>
         <p:spPr>
           <a:xfrm>
-            <a:off x="1234440" y="1828800"/>
-            <a:ext cx="3108960" cy="548640"/>
+            <a:off x="1234440" y="1691640"/>
+            <a:ext cx="3108960" cy="512064"/>
           </a:xfrm>
           <a:prstGeom prst="rect">
             <a:avLst/>
@@ -8205,8 +8523,8 @@
         </p:nvSpPr>
         <p:spPr>
           <a:xfrm>
-            <a:off x="4480560" y="1828800"/>
-            <a:ext cx="6949440" cy="548640"/>
+            <a:off x="4480560" y="1691640"/>
+            <a:ext cx="6949440" cy="512064"/>
           </a:xfrm>
           <a:prstGeom prst="rect">
             <a:avLst/>
@@ -8268,8 +8586,8 @@
         </p:nvSpPr>
         <p:spPr>
           <a:xfrm>
-            <a:off x="457200" y="2505456"/>
-            <a:ext cx="11155680" cy="676656"/>
+            <a:off x="457200" y="2267712"/>
+            <a:ext cx="11155680" cy="512064"/>
           </a:xfrm>
           <a:prstGeom prst="roundRect">
             <a:avLst>
@@ -8319,7 +8637,7 @@
         </p:nvSpPr>
         <p:spPr>
           <a:xfrm>
-            <a:off x="685800" y="2633472"/>
+            <a:off x="685800" y="2331720"/>
             <a:ext cx="384048" cy="384048"/>
           </a:xfrm>
           <a:prstGeom prst="ellipse">
@@ -8368,7 +8686,7 @@
         </p:nvSpPr>
         <p:spPr>
           <a:xfrm>
-            <a:off x="685800" y="2633472"/>
+            <a:off x="685800" y="2331720"/>
             <a:ext cx="384048" cy="384048"/>
           </a:xfrm>
           <a:prstGeom prst="rect">
@@ -8431,8 +8749,8 @@
         </p:nvSpPr>
         <p:spPr>
           <a:xfrm>
-            <a:off x="1234440" y="2578608"/>
-            <a:ext cx="3108960" cy="548640"/>
+            <a:off x="1234440" y="2267712"/>
+            <a:ext cx="3108960" cy="512064"/>
           </a:xfrm>
           <a:prstGeom prst="rect">
             <a:avLst/>
@@ -8494,8 +8812,8 @@
         </p:nvSpPr>
         <p:spPr>
           <a:xfrm>
-            <a:off x="4480560" y="2578608"/>
-            <a:ext cx="6949440" cy="548640"/>
+            <a:off x="4480560" y="2267712"/>
+            <a:ext cx="6949440" cy="512064"/>
           </a:xfrm>
           <a:prstGeom prst="rect">
             <a:avLst/>
@@ -8557,8 +8875,8 @@
         </p:nvSpPr>
         <p:spPr>
           <a:xfrm>
-            <a:off x="457200" y="3255264"/>
-            <a:ext cx="11155680" cy="676656"/>
+            <a:off x="457200" y="2843784"/>
+            <a:ext cx="11155680" cy="512064"/>
           </a:xfrm>
           <a:prstGeom prst="roundRect">
             <a:avLst>
@@ -8608,7 +8926,7 @@
         </p:nvSpPr>
         <p:spPr>
           <a:xfrm>
-            <a:off x="685800" y="3383280"/>
+            <a:off x="685800" y="2907792"/>
             <a:ext cx="384048" cy="384048"/>
           </a:xfrm>
           <a:prstGeom prst="ellipse">
@@ -8657,7 +8975,7 @@
         </p:nvSpPr>
         <p:spPr>
           <a:xfrm>
-            <a:off x="685800" y="3383280"/>
+            <a:off x="685800" y="2907792"/>
             <a:ext cx="384048" cy="384048"/>
           </a:xfrm>
           <a:prstGeom prst="rect">
@@ -8720,8 +9038,8 @@
         </p:nvSpPr>
         <p:spPr>
           <a:xfrm>
-            <a:off x="1234440" y="3328416"/>
-            <a:ext cx="3108960" cy="548640"/>
+            <a:off x="1234440" y="2843784"/>
+            <a:ext cx="3108960" cy="512064"/>
           </a:xfrm>
           <a:prstGeom prst="rect">
             <a:avLst/>
@@ -8783,8 +9101,8 @@
         </p:nvSpPr>
         <p:spPr>
           <a:xfrm>
-            <a:off x="4480560" y="3328416"/>
-            <a:ext cx="6949440" cy="548640"/>
+            <a:off x="4480560" y="2843784"/>
+            <a:ext cx="6949440" cy="512064"/>
           </a:xfrm>
           <a:prstGeom prst="rect">
             <a:avLst/>
@@ -8846,8 +9164,8 @@
         </p:nvSpPr>
         <p:spPr>
           <a:xfrm>
-            <a:off x="457200" y="4005072"/>
-            <a:ext cx="11155680" cy="676656"/>
+            <a:off x="457200" y="3419856"/>
+            <a:ext cx="11155680" cy="512064"/>
           </a:xfrm>
           <a:prstGeom prst="roundRect">
             <a:avLst>
@@ -8897,7 +9215,7 @@
         </p:nvSpPr>
         <p:spPr>
           <a:xfrm>
-            <a:off x="685800" y="4133088"/>
+            <a:off x="685800" y="3483864"/>
             <a:ext cx="384048" cy="384048"/>
           </a:xfrm>
           <a:prstGeom prst="ellipse">
@@ -8946,7 +9264,7 @@
         </p:nvSpPr>
         <p:spPr>
           <a:xfrm>
-            <a:off x="685800" y="4133088"/>
+            <a:off x="685800" y="3483864"/>
             <a:ext cx="384048" cy="384048"/>
           </a:xfrm>
           <a:prstGeom prst="rect">
@@ -9009,8 +9327,8 @@
         </p:nvSpPr>
         <p:spPr>
           <a:xfrm>
-            <a:off x="1234440" y="4078224"/>
-            <a:ext cx="3108960" cy="548640"/>
+            <a:off x="1234440" y="3419856"/>
+            <a:ext cx="3108960" cy="512064"/>
           </a:xfrm>
           <a:prstGeom prst="rect">
             <a:avLst/>
@@ -9072,8 +9390,8 @@
         </p:nvSpPr>
         <p:spPr>
           <a:xfrm>
-            <a:off x="4480560" y="4078224"/>
-            <a:ext cx="6949440" cy="548640"/>
+            <a:off x="4480560" y="3419856"/>
+            <a:ext cx="6949440" cy="512064"/>
           </a:xfrm>
           <a:prstGeom prst="rect">
             <a:avLst/>
@@ -9135,8 +9453,8 @@
         </p:nvSpPr>
         <p:spPr>
           <a:xfrm>
-            <a:off x="457200" y="4754880"/>
-            <a:ext cx="11155680" cy="676656"/>
+            <a:off x="457200" y="3995928"/>
+            <a:ext cx="11155680" cy="512064"/>
           </a:xfrm>
           <a:prstGeom prst="roundRect">
             <a:avLst>
@@ -9186,7 +9504,7 @@
         </p:nvSpPr>
         <p:spPr>
           <a:xfrm>
-            <a:off x="685800" y="4882896"/>
+            <a:off x="685800" y="4059936"/>
             <a:ext cx="384048" cy="384048"/>
           </a:xfrm>
           <a:prstGeom prst="ellipse">
@@ -9235,7 +9553,7 @@
         </p:nvSpPr>
         <p:spPr>
           <a:xfrm>
-            <a:off x="685800" y="4882896"/>
+            <a:off x="685800" y="4059936"/>
             <a:ext cx="384048" cy="384048"/>
           </a:xfrm>
           <a:prstGeom prst="rect">
@@ -9298,8 +9616,8 @@
         </p:nvSpPr>
         <p:spPr>
           <a:xfrm>
-            <a:off x="1234440" y="4828032"/>
-            <a:ext cx="3108960" cy="548640"/>
+            <a:off x="1234440" y="3995928"/>
+            <a:ext cx="3108960" cy="512064"/>
           </a:xfrm>
           <a:prstGeom prst="rect">
             <a:avLst/>
@@ -9361,8 +9679,8 @@
         </p:nvSpPr>
         <p:spPr>
           <a:xfrm>
-            <a:off x="4480560" y="4828032"/>
-            <a:ext cx="6949440" cy="548640"/>
+            <a:off x="4480560" y="3995928"/>
+            <a:ext cx="6949440" cy="512064"/>
           </a:xfrm>
           <a:prstGeom prst="rect">
             <a:avLst/>
@@ -9418,13 +9736,591 @@
       </p:sp>
       <p:sp>
         <p:nvSpPr>
+          <p:cNvPr id="279" name="Google Shape;273;p14"/>
+          <p:cNvSpPr/>
+          <p:nvPr/>
+        </p:nvSpPr>
+        <p:spPr>
+          <a:xfrm>
+            <a:off x="457200" y="4572000"/>
+            <a:ext cx="11155680" cy="512064"/>
+          </a:xfrm>
+          <a:prstGeom prst="roundRect">
+            <a:avLst>
+              <a:gd fmla="val 10811" name="adj"/>
+            </a:avLst>
+          </a:prstGeom>
+          <a:solidFill>
+            <a:srgbClr val="241C1A"/>
+          </a:solidFill>
+          <a:ln cap="flat" cmpd="sng" w="12700">
+            <a:solidFill>
+              <a:srgbClr val="3A2F2C"/>
+            </a:solidFill>
+            <a:prstDash val="solid"/>
+            <a:round/>
+            <a:headEnd len="sm" w="sm" type="none"/>
+            <a:tailEnd len="sm" w="sm" type="none"/>
+          </a:ln>
+        </p:spPr>
+        <p:txBody>
+          <a:bodyPr anchorCtr="0" anchor="ctr" bIns="91425" lIns="91425" spcFirstLastPara="1" rIns="91425" wrap="square" tIns="91425">
+            <a:noAutofit/>
+          </a:bodyPr>
+          <a:lstStyle/>
+          <a:p>
+            <a:pPr indent="0" lvl="0" marL="0" rtl="0" algn="l">
+              <a:spcBef>
+                <a:spcPts val="0"/>
+              </a:spcBef>
+              <a:spcAft>
+                <a:spcPts val="0"/>
+              </a:spcAft>
+              <a:buNone/>
+            </a:pPr>
+            <a:r>
+              <a:t/>
+            </a:r>
+            <a:endParaRPr/>
+          </a:p>
+        </p:txBody>
+      </p:sp>
+      <p:sp>
+        <p:nvSpPr>
+          <p:cNvPr id="280" name="Google Shape;274;p14"/>
+          <p:cNvSpPr/>
+          <p:nvPr/>
+        </p:nvSpPr>
+        <p:spPr>
+          <a:xfrm>
+            <a:off x="685800" y="4636008"/>
+            <a:ext cx="384048" cy="384048"/>
+          </a:xfrm>
+          <a:prstGeom prst="ellipse">
+            <a:avLst/>
+          </a:prstGeom>
+          <a:solidFill>
+            <a:srgbClr val="D9A441"/>
+          </a:solidFill>
+          <a:ln cap="flat" cmpd="sng" w="12700">
+            <a:solidFill>
+              <a:srgbClr val="D9A441"/>
+            </a:solidFill>
+            <a:prstDash val="solid"/>
+            <a:round/>
+            <a:headEnd len="sm" w="sm" type="none"/>
+            <a:tailEnd len="sm" w="sm" type="none"/>
+          </a:ln>
+        </p:spPr>
+        <p:txBody>
+          <a:bodyPr anchorCtr="0" anchor="ctr" bIns="91425" lIns="91425" spcFirstLastPara="1" rIns="91425" wrap="square" tIns="91425">
+            <a:noAutofit/>
+          </a:bodyPr>
+          <a:lstStyle/>
+          <a:p>
+            <a:pPr indent="0" lvl="0" marL="0" rtl="0" algn="l">
+              <a:spcBef>
+                <a:spcPts val="0"/>
+              </a:spcBef>
+              <a:spcAft>
+                <a:spcPts val="0"/>
+              </a:spcAft>
+              <a:buNone/>
+            </a:pPr>
+            <a:r>
+              <a:t/>
+            </a:r>
+            <a:endParaRPr/>
+          </a:p>
+        </p:txBody>
+      </p:sp>
+      <p:sp>
+        <p:nvSpPr>
+          <p:cNvPr id="281" name="Google Shape;275;p14"/>
+          <p:cNvSpPr txBox="1"/>
+          <p:nvPr/>
+        </p:nvSpPr>
+        <p:spPr>
+          <a:xfrm>
+            <a:off x="685800" y="4636008"/>
+            <a:ext cx="384048" cy="384048"/>
+          </a:xfrm>
+          <a:prstGeom prst="rect">
+            <a:avLst/>
+          </a:prstGeom>
+          <a:noFill/>
+          <a:ln>
+            <a:noFill/>
+          </a:ln>
+        </p:spPr>
+        <p:txBody>
+          <a:bodyPr anchorCtr="0" anchor="ctr" bIns="0" lIns="0" spcFirstLastPara="1" rIns="0" wrap="square" tIns="0">
+            <a:noAutofit/>
+          </a:bodyPr>
+          <a:lstStyle/>
+          <a:p>
+            <a:pPr indent="0" lvl="0" marL="0" marR="0" rtl="0" algn="ctr">
+              <a:spcBef>
+                <a:spcPts val="0"/>
+              </a:spcBef>
+              <a:spcAft>
+                <a:spcPts val="0"/>
+              </a:spcAft>
+              <a:buClr>
+                <a:srgbClr val="15110F"/>
+              </a:buClr>
+              <a:buSzPts val="1400"/>
+              <a:buFont typeface="Tahoma"/>
+              <a:buNone/>
+            </a:pPr>
+            <a:r>
+              <a:rPr b="1" i="0" lang="en-US" sz="1400" u="none" cap="none" strike="noStrike">
+                <a:solidFill>
+                  <a:srgbClr val="15110F"/>
+                </a:solidFill>
+                <a:latin typeface="Tahoma"/>
+                <a:ea typeface="Tahoma"/>
+                <a:cs typeface="Tahoma"/>
+                <a:sym typeface="Tahoma"/>
+              </a:rPr>
+              <a:t>6</a:t>
+            </a:r>
+            <a:endParaRPr b="0" i="0" sz="1400" u="none" cap="none" strike="noStrike">
+              <a:solidFill>
+                <a:schemeClr val="dk1"/>
+              </a:solidFill>
+              <a:latin typeface="Calibri"/>
+              <a:ea typeface="Calibri"/>
+              <a:cs typeface="Calibri"/>
+              <a:sym typeface="Calibri"/>
+            </a:endParaRPr>
+          </a:p>
+        </p:txBody>
+      </p:sp>
+      <p:sp>
+        <p:nvSpPr>
+          <p:cNvPr id="282" name="Google Shape;276;p14"/>
+          <p:cNvSpPr txBox="1"/>
+          <p:nvPr/>
+        </p:nvSpPr>
+        <p:spPr>
+          <a:xfrm>
+            <a:off x="1234440" y="4572000"/>
+            <a:ext cx="3108960" cy="512064"/>
+          </a:xfrm>
+          <a:prstGeom prst="rect">
+            <a:avLst/>
+          </a:prstGeom>
+          <a:noFill/>
+          <a:ln>
+            <a:noFill/>
+          </a:ln>
+        </p:spPr>
+        <p:txBody>
+          <a:bodyPr anchorCtr="0" anchor="ctr" bIns="0" lIns="0" spcFirstLastPara="1" rIns="0" wrap="square" tIns="0">
+            <a:noAutofit/>
+          </a:bodyPr>
+          <a:lstStyle/>
+          <a:p>
+            <a:pPr indent="0" lvl="0" marL="0" marR="0" rtl="0" algn="l">
+              <a:spcBef>
+                <a:spcPts val="0"/>
+              </a:spcBef>
+              <a:spcAft>
+                <a:spcPts val="0"/>
+              </a:spcAft>
+              <a:buClr>
+                <a:srgbClr val="F4EFED"/>
+              </a:buClr>
+              <a:buSzPts val="1200"/>
+              <a:buFont typeface="Tahoma"/>
+              <a:buNone/>
+            </a:pPr>
+            <a:r>
+              <a:rPr b="1" i="0" lang="en-US" sz="1200" u="none" cap="none" strike="noStrike">
+                <a:solidFill>
+                  <a:srgbClr val="F4EFED"/>
+                </a:solidFill>
+                <a:latin typeface="Tahoma"/>
+                <a:ea typeface="Tahoma"/>
+                <a:cs typeface="Tahoma"/>
+                <a:sym typeface="Tahoma"/>
+              </a:rPr>
+              <a:t>Unity ค้างตอน Host กดจบเกม</a:t>
+            </a:r>
+            <a:endParaRPr b="0" i="0" sz="1200" u="none" cap="none" strike="noStrike">
+              <a:solidFill>
+                <a:schemeClr val="dk1"/>
+              </a:solidFill>
+              <a:latin typeface="Calibri"/>
+              <a:ea typeface="Calibri"/>
+              <a:cs typeface="Calibri"/>
+              <a:sym typeface="Calibri"/>
+            </a:endParaRPr>
+          </a:p>
+        </p:txBody>
+      </p:sp>
+      <p:sp>
+        <p:nvSpPr>
+          <p:cNvPr id="283" name="Google Shape;277;p14"/>
+          <p:cNvSpPr txBox="1"/>
+          <p:nvPr/>
+        </p:nvSpPr>
+        <p:spPr>
+          <a:xfrm>
+            <a:off x="4480560" y="4572000"/>
+            <a:ext cx="6949440" cy="512064"/>
+          </a:xfrm>
+          <a:prstGeom prst="rect">
+            <a:avLst/>
+          </a:prstGeom>
+          <a:noFill/>
+          <a:ln>
+            <a:noFill/>
+          </a:ln>
+        </p:spPr>
+        <p:txBody>
+          <a:bodyPr anchorCtr="0" anchor="ctr" bIns="0" lIns="0" spcFirstLastPara="1" rIns="0" wrap="square" tIns="0">
+            <a:noAutofit/>
+          </a:bodyPr>
+          <a:lstStyle/>
+          <a:p>
+            <a:pPr indent="0" lvl="0" marL="0" marR="0" rtl="0" algn="l">
+              <a:spcBef>
+                <a:spcPts val="0"/>
+              </a:spcBef>
+              <a:spcAft>
+                <a:spcPts val="0"/>
+              </a:spcAft>
+              <a:buClr>
+                <a:srgbClr val="9A8F8B"/>
+              </a:buClr>
+              <a:buSzPts val="1100"/>
+              <a:buFont typeface="Tahoma"/>
+              <a:buNone/>
+            </a:pPr>
+            <a:r>
+              <a:rPr b="0" i="0" lang="en-US" sz="1100" u="none" cap="none" strike="noStrike">
+                <a:solidFill>
+                  <a:srgbClr val="9A8F8B"/>
+                </a:solidFill>
+                <a:latin typeface="Tahoma"/>
+                <a:ea typeface="Tahoma"/>
+                <a:cs typeface="Tahoma"/>
+                <a:sym typeface="Tahoma"/>
+              </a:rPr>
+              <a:t>หยุดเซิร์ฟเวอร์กับโหลดเมนูในเฟรมเดียวกัน — หาเจอจากการไล่ log ทีละขั้น</a:t>
+            </a:r>
+            <a:endParaRPr b="0" i="0" sz="1100" u="none" cap="none" strike="noStrike">
+              <a:solidFill>
+                <a:schemeClr val="dk1"/>
+              </a:solidFill>
+              <a:latin typeface="Calibri"/>
+              <a:ea typeface="Calibri"/>
+              <a:cs typeface="Calibri"/>
+              <a:sym typeface="Calibri"/>
+            </a:endParaRPr>
+          </a:p>
+        </p:txBody>
+      </p:sp>
+      <p:sp>
+        <p:nvSpPr>
+          <p:cNvPr id="284" name="Google Shape;273;p14"/>
+          <p:cNvSpPr/>
+          <p:nvPr/>
+        </p:nvSpPr>
+        <p:spPr>
+          <a:xfrm>
+            <a:off x="457200" y="5148072"/>
+            <a:ext cx="11155680" cy="512064"/>
+          </a:xfrm>
+          <a:prstGeom prst="roundRect">
+            <a:avLst>
+              <a:gd fmla="val 10811" name="adj"/>
+            </a:avLst>
+          </a:prstGeom>
+          <a:solidFill>
+            <a:srgbClr val="241C1A"/>
+          </a:solidFill>
+          <a:ln cap="flat" cmpd="sng" w="12700">
+            <a:solidFill>
+              <a:srgbClr val="3A2F2C"/>
+            </a:solidFill>
+            <a:prstDash val="solid"/>
+            <a:round/>
+            <a:headEnd len="sm" w="sm" type="none"/>
+            <a:tailEnd len="sm" w="sm" type="none"/>
+          </a:ln>
+        </p:spPr>
+        <p:txBody>
+          <a:bodyPr anchorCtr="0" anchor="ctr" bIns="91425" lIns="91425" spcFirstLastPara="1" rIns="91425" wrap="square" tIns="91425">
+            <a:noAutofit/>
+          </a:bodyPr>
+          <a:lstStyle/>
+          <a:p>
+            <a:pPr indent="0" lvl="0" marL="0" rtl="0" algn="l">
+              <a:spcBef>
+                <a:spcPts val="0"/>
+              </a:spcBef>
+              <a:spcAft>
+                <a:spcPts val="0"/>
+              </a:spcAft>
+              <a:buNone/>
+            </a:pPr>
+            <a:r>
+              <a:t/>
+            </a:r>
+            <a:endParaRPr/>
+          </a:p>
+        </p:txBody>
+      </p:sp>
+      <p:sp>
+        <p:nvSpPr>
+          <p:cNvPr id="285" name="Google Shape;274;p14"/>
+          <p:cNvSpPr/>
+          <p:nvPr/>
+        </p:nvSpPr>
+        <p:spPr>
+          <a:xfrm>
+            <a:off x="685800" y="5212080"/>
+            <a:ext cx="384048" cy="384048"/>
+          </a:xfrm>
+          <a:prstGeom prst="ellipse">
+            <a:avLst/>
+          </a:prstGeom>
+          <a:solidFill>
+            <a:srgbClr val="D9A441"/>
+          </a:solidFill>
+          <a:ln cap="flat" cmpd="sng" w="12700">
+            <a:solidFill>
+              <a:srgbClr val="D9A441"/>
+            </a:solidFill>
+            <a:prstDash val="solid"/>
+            <a:round/>
+            <a:headEnd len="sm" w="sm" type="none"/>
+            <a:tailEnd len="sm" w="sm" type="none"/>
+          </a:ln>
+        </p:spPr>
+        <p:txBody>
+          <a:bodyPr anchorCtr="0" anchor="ctr" bIns="91425" lIns="91425" spcFirstLastPara="1" rIns="91425" wrap="square" tIns="91425">
+            <a:noAutofit/>
+          </a:bodyPr>
+          <a:lstStyle/>
+          <a:p>
+            <a:pPr indent="0" lvl="0" marL="0" rtl="0" algn="l">
+              <a:spcBef>
+                <a:spcPts val="0"/>
+              </a:spcBef>
+              <a:spcAft>
+                <a:spcPts val="0"/>
+              </a:spcAft>
+              <a:buNone/>
+            </a:pPr>
+            <a:r>
+              <a:t/>
+            </a:r>
+            <a:endParaRPr/>
+          </a:p>
+        </p:txBody>
+      </p:sp>
+      <p:sp>
+        <p:nvSpPr>
+          <p:cNvPr id="286" name="Google Shape;275;p14"/>
+          <p:cNvSpPr txBox="1"/>
+          <p:nvPr/>
+        </p:nvSpPr>
+        <p:spPr>
+          <a:xfrm>
+            <a:off x="685800" y="5212080"/>
+            <a:ext cx="384048" cy="384048"/>
+          </a:xfrm>
+          <a:prstGeom prst="rect">
+            <a:avLst/>
+          </a:prstGeom>
+          <a:noFill/>
+          <a:ln>
+            <a:noFill/>
+          </a:ln>
+        </p:spPr>
+        <p:txBody>
+          <a:bodyPr anchorCtr="0" anchor="ctr" bIns="0" lIns="0" spcFirstLastPara="1" rIns="0" wrap="square" tIns="0">
+            <a:noAutofit/>
+          </a:bodyPr>
+          <a:lstStyle/>
+          <a:p>
+            <a:pPr indent="0" lvl="0" marL="0" marR="0" rtl="0" algn="ctr">
+              <a:spcBef>
+                <a:spcPts val="0"/>
+              </a:spcBef>
+              <a:spcAft>
+                <a:spcPts val="0"/>
+              </a:spcAft>
+              <a:buClr>
+                <a:srgbClr val="15110F"/>
+              </a:buClr>
+              <a:buSzPts val="1400"/>
+              <a:buFont typeface="Tahoma"/>
+              <a:buNone/>
+            </a:pPr>
+            <a:r>
+              <a:rPr b="1" i="0" lang="en-US" sz="1400" u="none" cap="none" strike="noStrike">
+                <a:solidFill>
+                  <a:srgbClr val="15110F"/>
+                </a:solidFill>
+                <a:latin typeface="Tahoma"/>
+                <a:ea typeface="Tahoma"/>
+                <a:cs typeface="Tahoma"/>
+                <a:sym typeface="Tahoma"/>
+              </a:rPr>
+              <a:t>7</a:t>
+            </a:r>
+            <a:endParaRPr b="0" i="0" sz="1400" u="none" cap="none" strike="noStrike">
+              <a:solidFill>
+                <a:schemeClr val="dk1"/>
+              </a:solidFill>
+              <a:latin typeface="Calibri"/>
+              <a:ea typeface="Calibri"/>
+              <a:cs typeface="Calibri"/>
+              <a:sym typeface="Calibri"/>
+            </a:endParaRPr>
+          </a:p>
+        </p:txBody>
+      </p:sp>
+      <p:sp>
+        <p:nvSpPr>
+          <p:cNvPr id="287" name="Google Shape;276;p14"/>
+          <p:cNvSpPr txBox="1"/>
+          <p:nvPr/>
+        </p:nvSpPr>
+        <p:spPr>
+          <a:xfrm>
+            <a:off x="1234440" y="5148072"/>
+            <a:ext cx="3108960" cy="512064"/>
+          </a:xfrm>
+          <a:prstGeom prst="rect">
+            <a:avLst/>
+          </a:prstGeom>
+          <a:noFill/>
+          <a:ln>
+            <a:noFill/>
+          </a:ln>
+        </p:spPr>
+        <p:txBody>
+          <a:bodyPr anchorCtr="0" anchor="ctr" bIns="0" lIns="0" spcFirstLastPara="1" rIns="0" wrap="square" tIns="0">
+            <a:noAutofit/>
+          </a:bodyPr>
+          <a:lstStyle/>
+          <a:p>
+            <a:pPr indent="0" lvl="0" marL="0" marR="0" rtl="0" algn="l">
+              <a:spcBef>
+                <a:spcPts val="0"/>
+              </a:spcBef>
+              <a:spcAft>
+                <a:spcPts val="0"/>
+              </a:spcAft>
+              <a:buClr>
+                <a:srgbClr val="F4EFED"/>
+              </a:buClr>
+              <a:buSzPts val="1200"/>
+              <a:buFont typeface="Tahoma"/>
+              <a:buNone/>
+            </a:pPr>
+            <a:r>
+              <a:rPr b="1" i="0" lang="en-US" sz="1200" u="none" cap="none" strike="noStrike">
+                <a:solidFill>
+                  <a:srgbClr val="F4EFED"/>
+                </a:solidFill>
+                <a:latin typeface="Tahoma"/>
+                <a:ea typeface="Tahoma"/>
+                <a:cs typeface="Tahoma"/>
+                <a:sym typeface="Tahoma"/>
+              </a:rPr>
+              <a:t>เข้าห้องเสียงได้ แต่ไม่มีใครได้ยิน</a:t>
+            </a:r>
+            <a:endParaRPr b="0" i="0" sz="1200" u="none" cap="none" strike="noStrike">
+              <a:solidFill>
+                <a:schemeClr val="dk1"/>
+              </a:solidFill>
+              <a:latin typeface="Calibri"/>
+              <a:ea typeface="Calibri"/>
+              <a:cs typeface="Calibri"/>
+              <a:sym typeface="Calibri"/>
+            </a:endParaRPr>
+          </a:p>
+        </p:txBody>
+      </p:sp>
+      <p:sp>
+        <p:nvSpPr>
+          <p:cNvPr id="288" name="Google Shape;277;p14"/>
+          <p:cNvSpPr txBox="1"/>
+          <p:nvPr/>
+        </p:nvSpPr>
+        <p:spPr>
+          <a:xfrm>
+            <a:off x="4480560" y="5148072"/>
+            <a:ext cx="6949440" cy="512064"/>
+          </a:xfrm>
+          <a:prstGeom prst="rect">
+            <a:avLst/>
+          </a:prstGeom>
+          <a:noFill/>
+          <a:ln>
+            <a:noFill/>
+          </a:ln>
+        </p:spPr>
+        <p:txBody>
+          <a:bodyPr anchorCtr="0" anchor="ctr" bIns="0" lIns="0" spcFirstLastPara="1" rIns="0" wrap="square" tIns="0">
+            <a:noAutofit/>
+          </a:bodyPr>
+          <a:lstStyle/>
+          <a:p>
+            <a:pPr indent="0" lvl="0" marL="0" marR="0" rtl="0" algn="l">
+              <a:spcBef>
+                <a:spcPts val="0"/>
+              </a:spcBef>
+              <a:spcAft>
+                <a:spcPts val="0"/>
+              </a:spcAft>
+              <a:buClr>
+                <a:srgbClr val="9A8F8B"/>
+              </a:buClr>
+              <a:buSzPts val="1100"/>
+              <a:buFont typeface="Tahoma"/>
+              <a:buNone/>
+            </a:pPr>
+            <a:r>
+              <a:rPr b="0" i="0" lang="en-US" sz="1100" u="none" cap="none" strike="noStrike">
+                <a:solidFill>
+                  <a:srgbClr val="9A8F8B"/>
+                </a:solidFill>
+                <a:latin typeface="Tahoma"/>
+                <a:ea typeface="Tahoma"/>
+                <a:cs typeface="Tahoma"/>
+                <a:sym typeface="Tahoma"/>
+              </a:rPr>
+              <a:t>EOS SDK เวอร์ชันที่ใช้ไม่ส่งเสียงให้ตัวเกม — เปลี่ยนไปส่งเสียงผ่าน Mirror</a:t>
+            </a:r>
+            <a:endParaRPr b="0" i="0" sz="1100" u="none" cap="none" strike="noStrike">
+              <a:solidFill>
+                <a:schemeClr val="dk1"/>
+              </a:solidFill>
+              <a:latin typeface="Calibri"/>
+              <a:ea typeface="Calibri"/>
+              <a:cs typeface="Calibri"/>
+              <a:sym typeface="Calibri"/>
+            </a:endParaRPr>
+          </a:p>
+        </p:txBody>
+      </p:sp>
+      <p:sp>
+        <p:nvSpPr>
           <p:cNvPr id="278" name="Google Shape;278;p14"/>
           <p:cNvSpPr txBox="1"/>
           <p:nvPr/>
         </p:nvSpPr>
         <p:spPr>
           <a:xfrm>
-            <a:off x="548640" y="5715000"/>
+            <a:off x="548640" y="5806440"/>
             <a:ext cx="11064240" cy="411480"/>
           </a:xfrm>
           <a:prstGeom prst="rect">
@@ -9465,7 +10361,7 @@
                 <a:cs typeface="Tahoma"/>
                 <a:sym typeface="Tahoma"/>
               </a:rPr>
-              <a:t>ทุกตัวหาเจอด้วยการไล่อ่านโค้ดและเอกสารจริง ไม่ได้ลองสุ่มแก้</a:t>
+              <a:t>ทุกตัวหาเจอด้วยการไล่อ่านโค้ด เอกสาร และ log จริง ไม่ได้ลองสุ่มแก้</a:t>
             </a:r>
             <a:endParaRPr b="0" i="0" sz="1250" u="none" cap="none" strike="noStrike">
               <a:solidFill>
@@ -10469,7 +11365,7 @@
                 <a:cs typeface="Tahoma"/>
                 <a:sym typeface="Tahoma"/>
               </a:rPr>
-              <a:t>สัปดาห์ที่ 1 – 4  ·  12 สิงหาคม – 19 กันยายน 2026</a:t>
+              <a:t>สัปดาห์ที่ 1 – 5  ·  12 สิงหาคม – 27 กันยายน 2026</a:t>
             </a:r>
             <a:endParaRPr b="0" i="0" sz="1400" u="none" cap="none" strike="noStrike">
               <a:solidFill>
@@ -10491,8 +11387,8 @@
         </p:nvSpPr>
         <p:spPr>
           <a:xfrm>
-            <a:off x="457200" y="1728216"/>
-            <a:ext cx="11155680" cy="493776"/>
+            <a:off x="457200" y="1691640"/>
+            <a:ext cx="11155680" cy="411480"/>
           </a:xfrm>
           <a:prstGeom prst="roundRect">
             <a:avLst>
@@ -10542,8 +11438,8 @@
         </p:nvSpPr>
         <p:spPr>
           <a:xfrm>
-            <a:off x="658368" y="1792224"/>
-            <a:ext cx="384048" cy="384048"/>
+            <a:off x="685800" y="1732788"/>
+            <a:ext cx="329184" cy="329184"/>
           </a:xfrm>
           <a:prstGeom prst="ellipse">
             <a:avLst/>
@@ -10591,8 +11487,8 @@
         </p:nvSpPr>
         <p:spPr>
           <a:xfrm>
-            <a:off x="658368" y="1792224"/>
-            <a:ext cx="384048" cy="384048"/>
+            <a:off x="685800" y="1732788"/>
+            <a:ext cx="329184" cy="329184"/>
           </a:xfrm>
           <a:prstGeom prst="rect">
             <a:avLst/>
@@ -10654,8 +11550,8 @@
         </p:nvSpPr>
         <p:spPr>
           <a:xfrm>
-            <a:off x="1188720" y="1783080"/>
-            <a:ext cx="3017520" cy="402336"/>
+            <a:off x="1188720" y="1691640"/>
+            <a:ext cx="3017520" cy="411480"/>
           </a:xfrm>
           <a:prstGeom prst="rect">
             <a:avLst/>
@@ -10717,8 +11613,8 @@
         </p:nvSpPr>
         <p:spPr>
           <a:xfrm>
-            <a:off x="4343400" y="1783080"/>
-            <a:ext cx="7086600" cy="402336"/>
+            <a:off x="4343400" y="1691640"/>
+            <a:ext cx="7086600" cy="411480"/>
           </a:xfrm>
           <a:prstGeom prst="rect">
             <a:avLst/>
@@ -10780,8 +11676,8 @@
         </p:nvSpPr>
         <p:spPr>
           <a:xfrm>
-            <a:off x="457200" y="2276856"/>
-            <a:ext cx="11155680" cy="493776"/>
+            <a:off x="457200" y="2148840"/>
+            <a:ext cx="11155680" cy="411480"/>
           </a:xfrm>
           <a:prstGeom prst="roundRect">
             <a:avLst>
@@ -10831,8 +11727,8 @@
         </p:nvSpPr>
         <p:spPr>
           <a:xfrm>
-            <a:off x="658368" y="2340864"/>
-            <a:ext cx="384048" cy="384048"/>
+            <a:off x="685800" y="2189988"/>
+            <a:ext cx="329184" cy="329184"/>
           </a:xfrm>
           <a:prstGeom prst="ellipse">
             <a:avLst/>
@@ -10880,8 +11776,8 @@
         </p:nvSpPr>
         <p:spPr>
           <a:xfrm>
-            <a:off x="658368" y="2340864"/>
-            <a:ext cx="384048" cy="384048"/>
+            <a:off x="685800" y="2189988"/>
+            <a:ext cx="329184" cy="329184"/>
           </a:xfrm>
           <a:prstGeom prst="rect">
             <a:avLst/>
@@ -10943,8 +11839,8 @@
         </p:nvSpPr>
         <p:spPr>
           <a:xfrm>
-            <a:off x="1188720" y="2331720"/>
-            <a:ext cx="3017520" cy="402336"/>
+            <a:off x="1188720" y="2148840"/>
+            <a:ext cx="3017520" cy="411480"/>
           </a:xfrm>
           <a:prstGeom prst="rect">
             <a:avLst/>
@@ -11006,8 +11902,8 @@
         </p:nvSpPr>
         <p:spPr>
           <a:xfrm>
-            <a:off x="4343400" y="2331720"/>
-            <a:ext cx="7086600" cy="402336"/>
+            <a:off x="4343400" y="2148840"/>
+            <a:ext cx="7086600" cy="411480"/>
           </a:xfrm>
           <a:prstGeom prst="rect">
             <a:avLst/>
@@ -11069,8 +11965,8 @@
         </p:nvSpPr>
         <p:spPr>
           <a:xfrm>
-            <a:off x="457200" y="2825496"/>
-            <a:ext cx="11155680" cy="493776"/>
+            <a:off x="457200" y="2606040"/>
+            <a:ext cx="11155680" cy="411480"/>
           </a:xfrm>
           <a:prstGeom prst="roundRect">
             <a:avLst>
@@ -11120,8 +12016,8 @@
         </p:nvSpPr>
         <p:spPr>
           <a:xfrm>
-            <a:off x="658368" y="2889504"/>
-            <a:ext cx="384048" cy="384048"/>
+            <a:off x="685800" y="2647188"/>
+            <a:ext cx="329184" cy="329184"/>
           </a:xfrm>
           <a:prstGeom prst="ellipse">
             <a:avLst/>
@@ -11169,8 +12065,8 @@
         </p:nvSpPr>
         <p:spPr>
           <a:xfrm>
-            <a:off x="658368" y="2889504"/>
-            <a:ext cx="384048" cy="384048"/>
+            <a:off x="685800" y="2647188"/>
+            <a:ext cx="329184" cy="329184"/>
           </a:xfrm>
           <a:prstGeom prst="rect">
             <a:avLst/>
@@ -11232,8 +12128,8 @@
         </p:nvSpPr>
         <p:spPr>
           <a:xfrm>
-            <a:off x="1188720" y="2880360"/>
-            <a:ext cx="3017520" cy="402336"/>
+            <a:off x="1188720" y="2606040"/>
+            <a:ext cx="3017520" cy="411480"/>
           </a:xfrm>
           <a:prstGeom prst="rect">
             <a:avLst/>
@@ -11295,8 +12191,8 @@
         </p:nvSpPr>
         <p:spPr>
           <a:xfrm>
-            <a:off x="4343400" y="2880360"/>
-            <a:ext cx="7086600" cy="402336"/>
+            <a:off x="4343400" y="2606040"/>
+            <a:ext cx="7086600" cy="411480"/>
           </a:xfrm>
           <a:prstGeom prst="rect">
             <a:avLst/>
@@ -11358,8 +12254,8 @@
         </p:nvSpPr>
         <p:spPr>
           <a:xfrm>
-            <a:off x="457200" y="3374136"/>
-            <a:ext cx="11155680" cy="493776"/>
+            <a:off x="457200" y="3063240"/>
+            <a:ext cx="11155680" cy="411480"/>
           </a:xfrm>
           <a:prstGeom prst="roundRect">
             <a:avLst>
@@ -11409,8 +12305,8 @@
         </p:nvSpPr>
         <p:spPr>
           <a:xfrm>
-            <a:off x="658368" y="3438144"/>
-            <a:ext cx="384048" cy="384048"/>
+            <a:off x="685800" y="3104388"/>
+            <a:ext cx="329184" cy="329184"/>
           </a:xfrm>
           <a:prstGeom prst="ellipse">
             <a:avLst/>
@@ -11458,8 +12354,8 @@
         </p:nvSpPr>
         <p:spPr>
           <a:xfrm>
-            <a:off x="658368" y="3438144"/>
-            <a:ext cx="384048" cy="384048"/>
+            <a:off x="685800" y="3104388"/>
+            <a:ext cx="329184" cy="329184"/>
           </a:xfrm>
           <a:prstGeom prst="rect">
             <a:avLst/>
@@ -11521,8 +12417,8 @@
         </p:nvSpPr>
         <p:spPr>
           <a:xfrm>
-            <a:off x="1188720" y="3429000"/>
-            <a:ext cx="3017520" cy="402336"/>
+            <a:off x="1188720" y="3063240"/>
+            <a:ext cx="3017520" cy="411480"/>
           </a:xfrm>
           <a:prstGeom prst="rect">
             <a:avLst/>
@@ -11584,8 +12480,8 @@
         </p:nvSpPr>
         <p:spPr>
           <a:xfrm>
-            <a:off x="4343400" y="3429000"/>
-            <a:ext cx="7086600" cy="402336"/>
+            <a:off x="4343400" y="3063240"/>
+            <a:ext cx="7086600" cy="411480"/>
           </a:xfrm>
           <a:prstGeom prst="rect">
             <a:avLst/>
@@ -11647,8 +12543,8 @@
         </p:nvSpPr>
         <p:spPr>
           <a:xfrm>
-            <a:off x="457200" y="3922776"/>
-            <a:ext cx="11155680" cy="493776"/>
+            <a:off x="457200" y="3520440"/>
+            <a:ext cx="11155680" cy="411480"/>
           </a:xfrm>
           <a:prstGeom prst="roundRect">
             <a:avLst>
@@ -11698,8 +12594,8 @@
         </p:nvSpPr>
         <p:spPr>
           <a:xfrm>
-            <a:off x="658368" y="3986784"/>
-            <a:ext cx="384048" cy="384048"/>
+            <a:off x="685800" y="3561588"/>
+            <a:ext cx="329184" cy="329184"/>
           </a:xfrm>
           <a:prstGeom prst="ellipse">
             <a:avLst/>
@@ -11747,8 +12643,8 @@
         </p:nvSpPr>
         <p:spPr>
           <a:xfrm>
-            <a:off x="658368" y="3986784"/>
-            <a:ext cx="384048" cy="384048"/>
+            <a:off x="685800" y="3561588"/>
+            <a:ext cx="329184" cy="329184"/>
           </a:xfrm>
           <a:prstGeom prst="rect">
             <a:avLst/>
@@ -11810,8 +12706,8 @@
         </p:nvSpPr>
         <p:spPr>
           <a:xfrm>
-            <a:off x="1188720" y="3977640"/>
-            <a:ext cx="3017520" cy="402336"/>
+            <a:off x="1188720" y="3520440"/>
+            <a:ext cx="3017520" cy="411480"/>
           </a:xfrm>
           <a:prstGeom prst="rect">
             <a:avLst/>
@@ -11873,8 +12769,8 @@
         </p:nvSpPr>
         <p:spPr>
           <a:xfrm>
-            <a:off x="4343400" y="3977640"/>
-            <a:ext cx="7086600" cy="402336"/>
+            <a:off x="4343400" y="3520440"/>
+            <a:ext cx="7086600" cy="411480"/>
           </a:xfrm>
           <a:prstGeom prst="rect">
             <a:avLst/>
@@ -11936,8 +12832,8 @@
         </p:nvSpPr>
         <p:spPr>
           <a:xfrm>
-            <a:off x="457200" y="4471416"/>
-            <a:ext cx="11155680" cy="493776"/>
+            <a:off x="457200" y="3977640"/>
+            <a:ext cx="11155680" cy="411480"/>
           </a:xfrm>
           <a:prstGeom prst="roundRect">
             <a:avLst>
@@ -11987,8 +12883,8 @@
         </p:nvSpPr>
         <p:spPr>
           <a:xfrm>
-            <a:off x="658368" y="4535424"/>
-            <a:ext cx="384048" cy="384048"/>
+            <a:off x="685800" y="4018788"/>
+            <a:ext cx="329184" cy="329184"/>
           </a:xfrm>
           <a:prstGeom prst="ellipse">
             <a:avLst/>
@@ -12036,8 +12932,8 @@
         </p:nvSpPr>
         <p:spPr>
           <a:xfrm>
-            <a:off x="658368" y="4535424"/>
-            <a:ext cx="384048" cy="384048"/>
+            <a:off x="685800" y="4018788"/>
+            <a:ext cx="329184" cy="329184"/>
           </a:xfrm>
           <a:prstGeom prst="rect">
             <a:avLst/>
@@ -12099,8 +12995,8 @@
         </p:nvSpPr>
         <p:spPr>
           <a:xfrm>
-            <a:off x="1188720" y="4526280"/>
-            <a:ext cx="3017520" cy="402336"/>
+            <a:off x="1188720" y="3977640"/>
+            <a:ext cx="3017520" cy="411480"/>
           </a:xfrm>
           <a:prstGeom prst="rect">
             <a:avLst/>
@@ -12162,8 +13058,8 @@
         </p:nvSpPr>
         <p:spPr>
           <a:xfrm>
-            <a:off x="4343400" y="4526280"/>
-            <a:ext cx="7086600" cy="402336"/>
+            <a:off x="4343400" y="3977640"/>
+            <a:ext cx="7086600" cy="411480"/>
           </a:xfrm>
           <a:prstGeom prst="rect">
             <a:avLst/>
@@ -12225,8 +13121,8 @@
         </p:nvSpPr>
         <p:spPr>
           <a:xfrm>
-            <a:off x="457200" y="5020056"/>
-            <a:ext cx="11155680" cy="493776"/>
+            <a:off x="457200" y="4434840"/>
+            <a:ext cx="11155680" cy="411480"/>
           </a:xfrm>
           <a:prstGeom prst="roundRect">
             <a:avLst>
@@ -12276,8 +13172,8 @@
         </p:nvSpPr>
         <p:spPr>
           <a:xfrm>
-            <a:off x="658368" y="5084064"/>
-            <a:ext cx="384048" cy="384048"/>
+            <a:off x="685800" y="4475988"/>
+            <a:ext cx="329184" cy="329184"/>
           </a:xfrm>
           <a:prstGeom prst="ellipse">
             <a:avLst/>
@@ -12325,8 +13221,8 @@
         </p:nvSpPr>
         <p:spPr>
           <a:xfrm>
-            <a:off x="658368" y="5084064"/>
-            <a:ext cx="384048" cy="384048"/>
+            <a:off x="685800" y="4475988"/>
+            <a:ext cx="329184" cy="329184"/>
           </a:xfrm>
           <a:prstGeom prst="rect">
             <a:avLst/>
@@ -12388,8 +13284,8 @@
         </p:nvSpPr>
         <p:spPr>
           <a:xfrm>
-            <a:off x="1188720" y="5074920"/>
-            <a:ext cx="3017520" cy="402336"/>
+            <a:off x="1188720" y="4434840"/>
+            <a:ext cx="3017520" cy="411480"/>
           </a:xfrm>
           <a:prstGeom prst="rect">
             <a:avLst/>
@@ -12451,8 +13347,8 @@
         </p:nvSpPr>
         <p:spPr>
           <a:xfrm>
-            <a:off x="4343400" y="5074920"/>
-            <a:ext cx="7086600" cy="402336"/>
+            <a:off x="4343400" y="4434840"/>
+            <a:ext cx="7086600" cy="411480"/>
           </a:xfrm>
           <a:prstGeom prst="rect">
             <a:avLst/>
@@ -12514,8 +13410,8 @@
         </p:nvSpPr>
         <p:spPr>
           <a:xfrm>
-            <a:off x="457200" y="5568696"/>
-            <a:ext cx="11155680" cy="493776"/>
+            <a:off x="457200" y="4892040"/>
+            <a:ext cx="11155680" cy="411480"/>
           </a:xfrm>
           <a:prstGeom prst="roundRect">
             <a:avLst>
@@ -12565,8 +13461,8 @@
         </p:nvSpPr>
         <p:spPr>
           <a:xfrm>
-            <a:off x="658368" y="5632704"/>
-            <a:ext cx="384048" cy="384048"/>
+            <a:off x="685800" y="4933188"/>
+            <a:ext cx="329184" cy="329184"/>
           </a:xfrm>
           <a:prstGeom prst="ellipse">
             <a:avLst/>
@@ -12614,8 +13510,8 @@
         </p:nvSpPr>
         <p:spPr>
           <a:xfrm>
-            <a:off x="658368" y="5632704"/>
-            <a:ext cx="384048" cy="384048"/>
+            <a:off x="685800" y="4933188"/>
+            <a:ext cx="329184" cy="329184"/>
           </a:xfrm>
           <a:prstGeom prst="rect">
             <a:avLst/>
@@ -12677,8 +13573,8 @@
         </p:nvSpPr>
         <p:spPr>
           <a:xfrm>
-            <a:off x="1188720" y="5623560"/>
-            <a:ext cx="3017520" cy="402336"/>
+            <a:off x="1188720" y="4892040"/>
+            <a:ext cx="3017520" cy="411480"/>
           </a:xfrm>
           <a:prstGeom prst="rect">
             <a:avLst/>
@@ -12740,8 +13636,8 @@
         </p:nvSpPr>
         <p:spPr>
           <a:xfrm>
-            <a:off x="4343400" y="5623560"/>
-            <a:ext cx="7086600" cy="402336"/>
+            <a:off x="4343400" y="4892040"/>
+            <a:ext cx="7086600" cy="411480"/>
           </a:xfrm>
           <a:prstGeom prst="rect">
             <a:avLst/>
@@ -12797,6 +13693,584 @@
       </p:sp>
       <p:sp>
         <p:nvSpPr>
+          <p:cNvPr id="343" name="Google Shape;337;p16"/>
+          <p:cNvSpPr/>
+          <p:nvPr/>
+        </p:nvSpPr>
+        <p:spPr>
+          <a:xfrm>
+            <a:off x="457200" y="5349240"/>
+            <a:ext cx="11155680" cy="411480"/>
+          </a:xfrm>
+          <a:prstGeom prst="roundRect">
+            <a:avLst>
+              <a:gd fmla="val 14815" name="adj"/>
+            </a:avLst>
+          </a:prstGeom>
+          <a:solidFill>
+            <a:srgbClr val="241C1A"/>
+          </a:solidFill>
+          <a:ln cap="flat" cmpd="sng" w="12700">
+            <a:solidFill>
+              <a:srgbClr val="3A2F2C"/>
+            </a:solidFill>
+            <a:prstDash val="solid"/>
+            <a:round/>
+            <a:headEnd len="sm" w="sm" type="none"/>
+            <a:tailEnd len="sm" w="sm" type="none"/>
+          </a:ln>
+        </p:spPr>
+        <p:txBody>
+          <a:bodyPr anchorCtr="0" anchor="ctr" bIns="91425" lIns="91425" spcFirstLastPara="1" rIns="91425" wrap="square" tIns="91425">
+            <a:noAutofit/>
+          </a:bodyPr>
+          <a:lstStyle/>
+          <a:p>
+            <a:pPr indent="0" lvl="0" marL="0" rtl="0" algn="l">
+              <a:spcBef>
+                <a:spcPts val="0"/>
+              </a:spcBef>
+              <a:spcAft>
+                <a:spcPts val="0"/>
+              </a:spcAft>
+              <a:buNone/>
+            </a:pPr>
+            <a:r>
+              <a:t/>
+            </a:r>
+            <a:endParaRPr/>
+          </a:p>
+        </p:txBody>
+      </p:sp>
+      <p:sp>
+        <p:nvSpPr>
+          <p:cNvPr id="344" name="Google Shape;338;p16"/>
+          <p:cNvSpPr/>
+          <p:nvPr/>
+        </p:nvSpPr>
+        <p:spPr>
+          <a:xfrm>
+            <a:off x="685800" y="5390388"/>
+            <a:ext cx="329184" cy="329184"/>
+          </a:xfrm>
+          <a:prstGeom prst="ellipse">
+            <a:avLst/>
+          </a:prstGeom>
+          <a:solidFill>
+            <a:srgbClr val="D9A441"/>
+          </a:solidFill>
+          <a:ln cap="flat" cmpd="sng" w="12700">
+            <a:solidFill>
+              <a:srgbClr val="D9A441"/>
+            </a:solidFill>
+            <a:prstDash val="solid"/>
+            <a:round/>
+            <a:headEnd len="sm" w="sm" type="none"/>
+            <a:tailEnd len="sm" w="sm" type="none"/>
+          </a:ln>
+        </p:spPr>
+        <p:txBody>
+          <a:bodyPr anchorCtr="0" anchor="ctr" bIns="91425" lIns="91425" spcFirstLastPara="1" rIns="91425" wrap="square" tIns="91425">
+            <a:noAutofit/>
+          </a:bodyPr>
+          <a:lstStyle/>
+          <a:p>
+            <a:pPr indent="0" lvl="0" marL="0" rtl="0" algn="l">
+              <a:spcBef>
+                <a:spcPts val="0"/>
+              </a:spcBef>
+              <a:spcAft>
+                <a:spcPts val="0"/>
+              </a:spcAft>
+              <a:buNone/>
+            </a:pPr>
+            <a:r>
+              <a:t/>
+            </a:r>
+            <a:endParaRPr/>
+          </a:p>
+        </p:txBody>
+      </p:sp>
+      <p:sp>
+        <p:nvSpPr>
+          <p:cNvPr id="345" name="Google Shape;339;p16"/>
+          <p:cNvSpPr txBox="1"/>
+          <p:nvPr/>
+        </p:nvSpPr>
+        <p:spPr>
+          <a:xfrm>
+            <a:off x="685800" y="5390388"/>
+            <a:ext cx="329184" cy="329184"/>
+          </a:xfrm>
+          <a:prstGeom prst="rect">
+            <a:avLst/>
+          </a:prstGeom>
+          <a:noFill/>
+          <a:ln>
+            <a:noFill/>
+          </a:ln>
+        </p:spPr>
+        <p:txBody>
+          <a:bodyPr anchorCtr="0" anchor="ctr" bIns="0" lIns="0" spcFirstLastPara="1" rIns="0" wrap="square" tIns="0">
+            <a:noAutofit/>
+          </a:bodyPr>
+          <a:lstStyle/>
+          <a:p>
+            <a:pPr indent="0" lvl="0" marL="0" marR="0" rtl="0" algn="ctr">
+              <a:spcBef>
+                <a:spcPts val="0"/>
+              </a:spcBef>
+              <a:spcAft>
+                <a:spcPts val="0"/>
+              </a:spcAft>
+              <a:buClr>
+                <a:srgbClr val="15110F"/>
+              </a:buClr>
+              <a:buSzPts val="1400"/>
+              <a:buFont typeface="Tahoma"/>
+              <a:buNone/>
+            </a:pPr>
+            <a:r>
+              <a:rPr b="1" i="0" lang="en-US" sz="1400" u="none" cap="none" strike="noStrike">
+                <a:solidFill>
+                  <a:srgbClr val="15110F"/>
+                </a:solidFill>
+                <a:latin typeface="Tahoma"/>
+                <a:ea typeface="Tahoma"/>
+                <a:cs typeface="Tahoma"/>
+                <a:sym typeface="Tahoma"/>
+              </a:rPr>
+              <a:t>9</a:t>
+            </a:r>
+            <a:endParaRPr b="0" i="0" sz="1400" u="none" cap="none" strike="noStrike">
+              <a:solidFill>
+                <a:schemeClr val="dk1"/>
+              </a:solidFill>
+              <a:latin typeface="Calibri"/>
+              <a:ea typeface="Calibri"/>
+              <a:cs typeface="Calibri"/>
+              <a:sym typeface="Calibri"/>
+            </a:endParaRPr>
+          </a:p>
+        </p:txBody>
+      </p:sp>
+      <p:sp>
+        <p:nvSpPr>
+          <p:cNvPr id="346" name="Google Shape;340;p16"/>
+          <p:cNvSpPr txBox="1"/>
+          <p:nvPr/>
+        </p:nvSpPr>
+        <p:spPr>
+          <a:xfrm>
+            <a:off x="1188720" y="5349240"/>
+            <a:ext cx="3017520" cy="411480"/>
+          </a:xfrm>
+          <a:prstGeom prst="rect">
+            <a:avLst/>
+          </a:prstGeom>
+          <a:noFill/>
+          <a:ln>
+            <a:noFill/>
+          </a:ln>
+        </p:spPr>
+        <p:txBody>
+          <a:bodyPr anchorCtr="0" anchor="ctr" bIns="0" lIns="0" spcFirstLastPara="1" rIns="0" wrap="square" tIns="0">
+            <a:noAutofit/>
+          </a:bodyPr>
+          <a:lstStyle/>
+          <a:p>
+            <a:pPr indent="0" lvl="0" marL="0" marR="0" rtl="0" algn="l">
+              <a:spcBef>
+                <a:spcPts val="0"/>
+              </a:spcBef>
+              <a:spcAft>
+                <a:spcPts val="0"/>
+              </a:spcAft>
+              <a:buClr>
+                <a:srgbClr val="F4EFED"/>
+              </a:buClr>
+              <a:buSzPts val="1200"/>
+              <a:buFont typeface="Tahoma"/>
+              <a:buNone/>
+            </a:pPr>
+            <a:r>
+              <a:rPr b="1" i="0" lang="en-US" sz="1200" u="none" cap="none" strike="noStrike">
+                <a:solidFill>
+                  <a:srgbClr val="F4EFED"/>
+                </a:solidFill>
+                <a:latin typeface="Tahoma"/>
+                <a:ea typeface="Tahoma"/>
+                <a:cs typeface="Tahoma"/>
+                <a:sym typeface="Tahoma"/>
+              </a:rPr>
+              <a:t>เมนูหลัก ห้องรอ และการตั้งค่า</a:t>
+            </a:r>
+            <a:endParaRPr b="0" i="0" sz="1200" u="none" cap="none" strike="noStrike">
+              <a:solidFill>
+                <a:schemeClr val="dk1"/>
+              </a:solidFill>
+              <a:latin typeface="Calibri"/>
+              <a:ea typeface="Calibri"/>
+              <a:cs typeface="Calibri"/>
+              <a:sym typeface="Calibri"/>
+            </a:endParaRPr>
+          </a:p>
+        </p:txBody>
+      </p:sp>
+      <p:sp>
+        <p:nvSpPr>
+          <p:cNvPr id="347" name="Google Shape;341;p16"/>
+          <p:cNvSpPr txBox="1"/>
+          <p:nvPr/>
+        </p:nvSpPr>
+        <p:spPr>
+          <a:xfrm>
+            <a:off x="4343400" y="5349240"/>
+            <a:ext cx="7086600" cy="411480"/>
+          </a:xfrm>
+          <a:prstGeom prst="rect">
+            <a:avLst/>
+          </a:prstGeom>
+          <a:noFill/>
+          <a:ln>
+            <a:noFill/>
+          </a:ln>
+        </p:spPr>
+        <p:txBody>
+          <a:bodyPr anchorCtr="0" anchor="ctr" bIns="0" lIns="0" spcFirstLastPara="1" rIns="0" wrap="square" tIns="0">
+            <a:noAutofit/>
+          </a:bodyPr>
+          <a:lstStyle/>
+          <a:p>
+            <a:pPr indent="0" lvl="0" marL="0" marR="0" rtl="0" algn="l">
+              <a:spcBef>
+                <a:spcPts val="0"/>
+              </a:spcBef>
+              <a:spcAft>
+                <a:spcPts val="0"/>
+              </a:spcAft>
+              <a:buClr>
+                <a:srgbClr val="9A8F8B"/>
+              </a:buClr>
+              <a:buSzPts val="1050"/>
+              <a:buFont typeface="Tahoma"/>
+              <a:buNone/>
+            </a:pPr>
+            <a:r>
+              <a:rPr b="0" i="0" lang="en-US" sz="1050" u="none" cap="none" strike="noStrike">
+                <a:solidFill>
+                  <a:srgbClr val="9A8F8B"/>
+                </a:solidFill>
+                <a:latin typeface="Tahoma"/>
+                <a:ea typeface="Tahoma"/>
+                <a:cs typeface="Tahoma"/>
+                <a:sym typeface="Tahoma"/>
+              </a:rPr>
+              <a:t>สร้างห้อง / หาห้อง / เข้าห้องด่วน, Ready – Start, เมนู Esc, ความสว่าง และเสียงแยก 4 หมวด</a:t>
+            </a:r>
+            <a:endParaRPr b="0" i="0" sz="1050" u="none" cap="none" strike="noStrike">
+              <a:solidFill>
+                <a:schemeClr val="dk1"/>
+              </a:solidFill>
+              <a:latin typeface="Calibri"/>
+              <a:ea typeface="Calibri"/>
+              <a:cs typeface="Calibri"/>
+              <a:sym typeface="Calibri"/>
+            </a:endParaRPr>
+          </a:p>
+        </p:txBody>
+      </p:sp>
+      <p:sp>
+        <p:nvSpPr>
+          <p:cNvPr id="348" name="Google Shape;337;p16"/>
+          <p:cNvSpPr/>
+          <p:nvPr/>
+        </p:nvSpPr>
+        <p:spPr>
+          <a:xfrm>
+            <a:off x="457200" y="5806440"/>
+            <a:ext cx="11155680" cy="411480"/>
+          </a:xfrm>
+          <a:prstGeom prst="roundRect">
+            <a:avLst>
+              <a:gd fmla="val 14815" name="adj"/>
+            </a:avLst>
+          </a:prstGeom>
+          <a:solidFill>
+            <a:srgbClr val="241C1A"/>
+          </a:solidFill>
+          <a:ln cap="flat" cmpd="sng" w="12700">
+            <a:solidFill>
+              <a:srgbClr val="3A2F2C"/>
+            </a:solidFill>
+            <a:prstDash val="solid"/>
+            <a:round/>
+            <a:headEnd len="sm" w="sm" type="none"/>
+            <a:tailEnd len="sm" w="sm" type="none"/>
+          </a:ln>
+        </p:spPr>
+        <p:txBody>
+          <a:bodyPr anchorCtr="0" anchor="ctr" bIns="91425" lIns="91425" spcFirstLastPara="1" rIns="91425" wrap="square" tIns="91425">
+            <a:noAutofit/>
+          </a:bodyPr>
+          <a:lstStyle/>
+          <a:p>
+            <a:pPr indent="0" lvl="0" marL="0" rtl="0" algn="l">
+              <a:spcBef>
+                <a:spcPts val="0"/>
+              </a:spcBef>
+              <a:spcAft>
+                <a:spcPts val="0"/>
+              </a:spcAft>
+              <a:buNone/>
+            </a:pPr>
+            <a:r>
+              <a:t/>
+            </a:r>
+            <a:endParaRPr/>
+          </a:p>
+        </p:txBody>
+      </p:sp>
+      <p:sp>
+        <p:nvSpPr>
+          <p:cNvPr id="349" name="Google Shape;338;p16"/>
+          <p:cNvSpPr/>
+          <p:nvPr/>
+        </p:nvSpPr>
+        <p:spPr>
+          <a:xfrm>
+            <a:off x="685800" y="5847588"/>
+            <a:ext cx="329184" cy="329184"/>
+          </a:xfrm>
+          <a:prstGeom prst="ellipse">
+            <a:avLst/>
+          </a:prstGeom>
+          <a:solidFill>
+            <a:srgbClr val="D9A441"/>
+          </a:solidFill>
+          <a:ln cap="flat" cmpd="sng" w="12700">
+            <a:solidFill>
+              <a:srgbClr val="D9A441"/>
+            </a:solidFill>
+            <a:prstDash val="solid"/>
+            <a:round/>
+            <a:headEnd len="sm" w="sm" type="none"/>
+            <a:tailEnd len="sm" w="sm" type="none"/>
+          </a:ln>
+        </p:spPr>
+        <p:txBody>
+          <a:bodyPr anchorCtr="0" anchor="ctr" bIns="91425" lIns="91425" spcFirstLastPara="1" rIns="91425" wrap="square" tIns="91425">
+            <a:noAutofit/>
+          </a:bodyPr>
+          <a:lstStyle/>
+          <a:p>
+            <a:pPr indent="0" lvl="0" marL="0" rtl="0" algn="l">
+              <a:spcBef>
+                <a:spcPts val="0"/>
+              </a:spcBef>
+              <a:spcAft>
+                <a:spcPts val="0"/>
+              </a:spcAft>
+              <a:buNone/>
+            </a:pPr>
+            <a:r>
+              <a:t/>
+            </a:r>
+            <a:endParaRPr/>
+          </a:p>
+        </p:txBody>
+      </p:sp>
+      <p:sp>
+        <p:nvSpPr>
+          <p:cNvPr id="350" name="Google Shape;339;p16"/>
+          <p:cNvSpPr txBox="1"/>
+          <p:nvPr/>
+        </p:nvSpPr>
+        <p:spPr>
+          <a:xfrm>
+            <a:off x="685800" y="5847588"/>
+            <a:ext cx="329184" cy="329184"/>
+          </a:xfrm>
+          <a:prstGeom prst="rect">
+            <a:avLst/>
+          </a:prstGeom>
+          <a:noFill/>
+          <a:ln>
+            <a:noFill/>
+          </a:ln>
+        </p:spPr>
+        <p:txBody>
+          <a:bodyPr anchorCtr="0" anchor="ctr" bIns="0" lIns="0" spcFirstLastPara="1" rIns="0" wrap="square" tIns="0">
+            <a:noAutofit/>
+          </a:bodyPr>
+          <a:lstStyle/>
+          <a:p>
+            <a:pPr indent="0" lvl="0" marL="0" marR="0" rtl="0" algn="ctr">
+              <a:spcBef>
+                <a:spcPts val="0"/>
+              </a:spcBef>
+              <a:spcAft>
+                <a:spcPts val="0"/>
+              </a:spcAft>
+              <a:buClr>
+                <a:srgbClr val="15110F"/>
+              </a:buClr>
+              <a:buSzPts val="1400"/>
+              <a:buFont typeface="Tahoma"/>
+              <a:buNone/>
+            </a:pPr>
+            <a:r>
+              <a:rPr b="1" i="0" lang="en-US" sz="1400" u="none" cap="none" strike="noStrike">
+                <a:solidFill>
+                  <a:srgbClr val="15110F"/>
+                </a:solidFill>
+                <a:latin typeface="Tahoma"/>
+                <a:ea typeface="Tahoma"/>
+                <a:cs typeface="Tahoma"/>
+                <a:sym typeface="Tahoma"/>
+              </a:rPr>
+              <a:t>10</a:t>
+            </a:r>
+            <a:endParaRPr b="0" i="0" sz="1400" u="none" cap="none" strike="noStrike">
+              <a:solidFill>
+                <a:schemeClr val="dk1"/>
+              </a:solidFill>
+              <a:latin typeface="Calibri"/>
+              <a:ea typeface="Calibri"/>
+              <a:cs typeface="Calibri"/>
+              <a:sym typeface="Calibri"/>
+            </a:endParaRPr>
+          </a:p>
+        </p:txBody>
+      </p:sp>
+      <p:sp>
+        <p:nvSpPr>
+          <p:cNvPr id="351" name="Google Shape;340;p16"/>
+          <p:cNvSpPr txBox="1"/>
+          <p:nvPr/>
+        </p:nvSpPr>
+        <p:spPr>
+          <a:xfrm>
+            <a:off x="1188720" y="5806440"/>
+            <a:ext cx="3017520" cy="411480"/>
+          </a:xfrm>
+          <a:prstGeom prst="rect">
+            <a:avLst/>
+          </a:prstGeom>
+          <a:noFill/>
+          <a:ln>
+            <a:noFill/>
+          </a:ln>
+        </p:spPr>
+        <p:txBody>
+          <a:bodyPr anchorCtr="0" anchor="ctr" bIns="0" lIns="0" spcFirstLastPara="1" rIns="0" wrap="square" tIns="0">
+            <a:noAutofit/>
+          </a:bodyPr>
+          <a:lstStyle/>
+          <a:p>
+            <a:pPr indent="0" lvl="0" marL="0" marR="0" rtl="0" algn="l">
+              <a:spcBef>
+                <a:spcPts val="0"/>
+              </a:spcBef>
+              <a:spcAft>
+                <a:spcPts val="0"/>
+              </a:spcAft>
+              <a:buClr>
+                <a:srgbClr val="F4EFED"/>
+              </a:buClr>
+              <a:buSzPts val="1200"/>
+              <a:buFont typeface="Tahoma"/>
+              <a:buNone/>
+            </a:pPr>
+            <a:r>
+              <a:rPr b="1" i="0" lang="en-US" sz="1200" u="none" cap="none" strike="noStrike">
+                <a:solidFill>
+                  <a:srgbClr val="F4EFED"/>
+                </a:solidFill>
+                <a:latin typeface="Tahoma"/>
+                <a:ea typeface="Tahoma"/>
+                <a:cs typeface="Tahoma"/>
+                <a:sym typeface="Tahoma"/>
+              </a:rPr>
+              <a:t>เสียงพูด 3D และวิทยุสื่อสาร</a:t>
+            </a:r>
+            <a:endParaRPr b="0" i="0" sz="1200" u="none" cap="none" strike="noStrike">
+              <a:solidFill>
+                <a:schemeClr val="dk1"/>
+              </a:solidFill>
+              <a:latin typeface="Calibri"/>
+              <a:ea typeface="Calibri"/>
+              <a:cs typeface="Calibri"/>
+              <a:sym typeface="Calibri"/>
+            </a:endParaRPr>
+          </a:p>
+        </p:txBody>
+      </p:sp>
+      <p:sp>
+        <p:nvSpPr>
+          <p:cNvPr id="352" name="Google Shape;341;p16"/>
+          <p:cNvSpPr txBox="1"/>
+          <p:nvPr/>
+        </p:nvSpPr>
+        <p:spPr>
+          <a:xfrm>
+            <a:off x="4343400" y="5806440"/>
+            <a:ext cx="7086600" cy="411480"/>
+          </a:xfrm>
+          <a:prstGeom prst="rect">
+            <a:avLst/>
+          </a:prstGeom>
+          <a:noFill/>
+          <a:ln>
+            <a:noFill/>
+          </a:ln>
+        </p:spPr>
+        <p:txBody>
+          <a:bodyPr anchorCtr="0" anchor="ctr" bIns="0" lIns="0" spcFirstLastPara="1" rIns="0" wrap="square" tIns="0">
+            <a:noAutofit/>
+          </a:bodyPr>
+          <a:lstStyle/>
+          <a:p>
+            <a:pPr indent="0" lvl="0" marL="0" marR="0" rtl="0" algn="l">
+              <a:spcBef>
+                <a:spcPts val="0"/>
+              </a:spcBef>
+              <a:spcAft>
+                <a:spcPts val="0"/>
+              </a:spcAft>
+              <a:buClr>
+                <a:srgbClr val="9A8F8B"/>
+              </a:buClr>
+              <a:buSzPts val="1050"/>
+              <a:buFont typeface="Tahoma"/>
+              <a:buNone/>
+            </a:pPr>
+            <a:r>
+              <a:rPr b="0" i="0" lang="en-US" sz="1050" u="none" cap="none" strike="noStrike">
+                <a:solidFill>
+                  <a:srgbClr val="9A8F8B"/>
+                </a:solidFill>
+                <a:latin typeface="Tahoma"/>
+                <a:ea typeface="Tahoma"/>
+                <a:cs typeface="Tahoma"/>
+                <a:sym typeface="Tahoma"/>
+              </a:rPr>
+              <a:t>ส่งเสียงผ่าน Mirror ได้ยินตามระยะ 25 เมตร วิทยุคุยได้ไม่จำกัดระยะ และ Hotbar 4 ช่อง</a:t>
+            </a:r>
+            <a:endParaRPr b="0" i="0" sz="1050" u="none" cap="none" strike="noStrike">
+              <a:solidFill>
+                <a:schemeClr val="dk1"/>
+              </a:solidFill>
+              <a:latin typeface="Calibri"/>
+              <a:ea typeface="Calibri"/>
+              <a:cs typeface="Calibri"/>
+              <a:sym typeface="Calibri"/>
+            </a:endParaRPr>
+          </a:p>
+        </p:txBody>
+      </p:sp>
+      <p:sp>
+        <p:nvSpPr>
           <p:cNvPr id="342" name="Google Shape;342;p16"/>
           <p:cNvSpPr txBox="1"/>
           <p:nvPr/>
@@ -12844,9 +14318,1650 @@
                 <a:cs typeface="Tahoma"/>
                 <a:sym typeface="Tahoma"/>
               </a:rPr>
-              <a:t>รวม 19 commit · เขียนเอง 2,800+ บรรทัด · รื้อให้ออนไลน์อีก 1,460+ บรรทัด · บั๊กใหญ่ที่หาต้นตอเจอ 10 ตัว</a:t>
+              <a:t>รวม 29 commit · เขียนเอง 9,000+ บรรทัด · รื้อให้ออนไลน์อีก 1,460+ บรรทัด · บั๊กใหญ่ที่หาต้นตอเจอ 12 ตัว</a:t>
             </a:r>
             <a:endParaRPr b="0" i="0" sz="1250" u="none" cap="none" strike="noStrike">
+              <a:solidFill>
+                <a:schemeClr val="dk1"/>
+              </a:solidFill>
+              <a:latin typeface="Calibri"/>
+              <a:ea typeface="Calibri"/>
+              <a:cs typeface="Calibri"/>
+              <a:sym typeface="Calibri"/>
+            </a:endParaRPr>
+          </a:p>
+        </p:txBody>
+      </p:sp>
+    </p:spTree>
+  </p:cSld>
+  <p:clrMapOvr>
+    <a:masterClrMapping/>
+  </p:clrMapOvr>
+</p:sld>
+</file>
+
+<file path=ppt/slides/slide15.xml><?xml version="1.0" encoding="utf-8"?>
+<p:sld xmlns:a="http://schemas.openxmlformats.org/drawingml/2006/main" xmlns:r="http://schemas.openxmlformats.org/officeDocument/2006/relationships" xmlns:mc="http://schemas.openxmlformats.org/markup-compatibility/2006" xmlns:mv="urn:schemas-microsoft-com:mac:vml" xmlns:p="http://schemas.openxmlformats.org/presentationml/2006/main" xmlns:c="http://schemas.openxmlformats.org/drawingml/2006/chart" xmlns:dgm="http://schemas.openxmlformats.org/drawingml/2006/diagram" xmlns:o="urn:schemas-microsoft-com:office:office" xmlns:v="urn:schemas-microsoft-com:vml" xmlns:pvml="urn:schemas-microsoft-com:office:powerpoint" xmlns:com="http://schemas.openxmlformats.org/drawingml/2006/compatibility" xmlns:p14="http://schemas.microsoft.com/office/powerpoint/2010/main" xmlns:p15="http://schemas.microsoft.com/office/powerpoint/2012/main" xmlns:ahyp="http://schemas.microsoft.com/office/drawing/2018/hyperlinkcolor">
+  <p:cSld>
+    <p:bg>
+      <p:bgPr>
+        <a:solidFill>
+          <a:srgbClr val="15110F"/>
+        </a:solidFill>
+      </p:bgPr>
+    </p:bg>
+    <p:spTree>
+      <p:nvGrpSpPr>
+        <p:cNvPr id="120" name="Shape 120"/>
+        <p:cNvGrpSpPr/>
+        <p:nvPr/>
+      </p:nvGrpSpPr>
+      <p:grpSpPr>
+        <a:xfrm>
+          <a:off x="0" y="0"/>
+          <a:ext cx="0" cy="0"/>
+          <a:chOff x="0" y="0"/>
+          <a:chExt cx="0" cy="0"/>
+        </a:xfrm>
+      </p:grpSpPr>
+      <p:sp>
+        <p:nvSpPr>
+          <p:cNvPr id="121" name="Google Shape;121;p8"/>
+          <p:cNvSpPr txBox="1"/>
+          <p:nvPr/>
+        </p:nvSpPr>
+        <p:spPr>
+          <a:xfrm>
+            <a:off x="548640" y="411480"/>
+            <a:ext cx="11064240" cy="777240"/>
+          </a:xfrm>
+          <a:prstGeom prst="rect">
+            <a:avLst/>
+          </a:prstGeom>
+          <a:noFill/>
+          <a:ln>
+            <a:noFill/>
+          </a:ln>
+        </p:spPr>
+        <p:txBody>
+          <a:bodyPr anchorCtr="0" anchor="ctr" bIns="0" lIns="0" spcFirstLastPara="1" rIns="0" wrap="square" tIns="0">
+            <a:noAutofit/>
+          </a:bodyPr>
+          <a:lstStyle/>
+          <a:p>
+            <a:pPr indent="0" lvl="0" marL="0" marR="0" rtl="0" algn="l">
+              <a:spcBef>
+                <a:spcPts val="0"/>
+              </a:spcBef>
+              <a:spcAft>
+                <a:spcPts val="0"/>
+              </a:spcAft>
+              <a:buClr>
+                <a:srgbClr val="F4EFED"/>
+              </a:buClr>
+              <a:buSzPts val="3200"/>
+              <a:buFont typeface="Tahoma"/>
+              <a:buNone/>
+            </a:pPr>
+            <a:r>
+              <a:rPr b="1" i="0" lang="en-US" sz="3200" u="none" cap="none" strike="noStrike">
+                <a:solidFill>
+                  <a:srgbClr val="F4EFED"/>
+                </a:solidFill>
+                <a:latin typeface="Tahoma"/>
+                <a:ea typeface="Tahoma"/>
+                <a:cs typeface="Tahoma"/>
+                <a:sym typeface="Tahoma"/>
+              </a:rPr>
+              <a:t>8. เมนูหลัก ห้องรอ และการตั้งค่า</a:t>
+            </a:r>
+            <a:endParaRPr b="0" i="0" sz="3200" u="none" cap="none" strike="noStrike">
+              <a:solidFill>
+                <a:schemeClr val="dk1"/>
+              </a:solidFill>
+              <a:latin typeface="Calibri"/>
+              <a:ea typeface="Calibri"/>
+              <a:cs typeface="Calibri"/>
+              <a:sym typeface="Calibri"/>
+            </a:endParaRPr>
+          </a:p>
+        </p:txBody>
+      </p:sp>
+      <p:sp>
+        <p:nvSpPr>
+          <p:cNvPr id="122" name="Google Shape;122;p8"/>
+          <p:cNvSpPr txBox="1"/>
+          <p:nvPr/>
+        </p:nvSpPr>
+        <p:spPr>
+          <a:xfrm>
+            <a:off x="548640" y="1170432"/>
+            <a:ext cx="11064240" cy="384048"/>
+          </a:xfrm>
+          <a:prstGeom prst="rect">
+            <a:avLst/>
+          </a:prstGeom>
+          <a:noFill/>
+          <a:ln>
+            <a:noFill/>
+          </a:ln>
+        </p:spPr>
+        <p:txBody>
+          <a:bodyPr anchorCtr="0" anchor="ctr" bIns="0" lIns="0" spcFirstLastPara="1" rIns="0" wrap="square" tIns="0">
+            <a:noAutofit/>
+          </a:bodyPr>
+          <a:lstStyle/>
+          <a:p>
+            <a:pPr indent="0" lvl="0" marL="0" marR="0" rtl="0" algn="l">
+              <a:spcBef>
+                <a:spcPts val="0"/>
+              </a:spcBef>
+              <a:spcAft>
+                <a:spcPts val="0"/>
+              </a:spcAft>
+              <a:buClr>
+                <a:srgbClr val="D9A441"/>
+              </a:buClr>
+              <a:buSzPts val="1400"/>
+              <a:buFont typeface="Tahoma"/>
+              <a:buNone/>
+            </a:pPr>
+            <a:r>
+              <a:rPr b="0" i="0" lang="en-US" sz="1400" u="none" cap="none" strike="noStrike">
+                <a:solidFill>
+                  <a:srgbClr val="D9A441"/>
+                </a:solidFill>
+                <a:latin typeface="Tahoma"/>
+                <a:ea typeface="Tahoma"/>
+                <a:cs typeface="Tahoma"/>
+                <a:sym typeface="Tahoma"/>
+              </a:rPr>
+              <a:t>สัปดาห์ที่ 5  ·  ผมเขียนเองทั้งหมด</a:t>
+            </a:r>
+            <a:endParaRPr b="0" i="0" sz="1400" u="none" cap="none" strike="noStrike">
+              <a:solidFill>
+                <a:schemeClr val="dk1"/>
+              </a:solidFill>
+              <a:latin typeface="Calibri"/>
+              <a:ea typeface="Calibri"/>
+              <a:cs typeface="Calibri"/>
+              <a:sym typeface="Calibri"/>
+            </a:endParaRPr>
+          </a:p>
+        </p:txBody>
+      </p:sp>
+      <p:sp>
+        <p:nvSpPr>
+          <p:cNvPr id="123" name="Google Shape;123;p8"/>
+          <p:cNvSpPr/>
+          <p:nvPr/>
+        </p:nvSpPr>
+        <p:spPr>
+          <a:xfrm>
+            <a:off x="548640" y="1828800"/>
+            <a:ext cx="11064240" cy="1920240"/>
+          </a:xfrm>
+          <a:prstGeom prst="roundRect">
+            <a:avLst>
+              <a:gd fmla="val 3810" name="adj"/>
+            </a:avLst>
+          </a:prstGeom>
+          <a:solidFill>
+            <a:srgbClr val="241C1A"/>
+          </a:solidFill>
+          <a:ln cap="flat" cmpd="sng" w="12700">
+            <a:solidFill>
+              <a:srgbClr val="3A2F2C"/>
+            </a:solidFill>
+            <a:prstDash val="solid"/>
+            <a:round/>
+            <a:headEnd len="sm" w="sm" type="none"/>
+            <a:tailEnd len="sm" w="sm" type="none"/>
+          </a:ln>
+        </p:spPr>
+        <p:txBody>
+          <a:bodyPr anchorCtr="0" anchor="ctr" bIns="91425" lIns="91425" spcFirstLastPara="1" rIns="91425" wrap="square" tIns="91425">
+            <a:noAutofit/>
+          </a:bodyPr>
+          <a:lstStyle/>
+          <a:p>
+            <a:pPr indent="0" lvl="0" marL="0" rtl="0" algn="l">
+              <a:spcBef>
+                <a:spcPts val="0"/>
+              </a:spcBef>
+              <a:spcAft>
+                <a:spcPts val="0"/>
+              </a:spcAft>
+              <a:buNone/>
+            </a:pPr>
+            <a:r>
+              <a:t/>
+            </a:r>
+            <a:endParaRPr/>
+          </a:p>
+        </p:txBody>
+      </p:sp>
+      <p:sp>
+        <p:nvSpPr>
+          <p:cNvPr id="124" name="Google Shape;124;p8"/>
+          <p:cNvSpPr txBox="1"/>
+          <p:nvPr/>
+        </p:nvSpPr>
+        <p:spPr>
+          <a:xfrm>
+            <a:off x="868680" y="2011680"/>
+            <a:ext cx="10424160" cy="365760"/>
+          </a:xfrm>
+          <a:prstGeom prst="rect">
+            <a:avLst/>
+          </a:prstGeom>
+          <a:noFill/>
+          <a:ln>
+            <a:noFill/>
+          </a:ln>
+        </p:spPr>
+        <p:txBody>
+          <a:bodyPr anchorCtr="0" anchor="ctr" bIns="0" lIns="0" spcFirstLastPara="1" rIns="0" wrap="square" tIns="0">
+            <a:noAutofit/>
+          </a:bodyPr>
+          <a:lstStyle/>
+          <a:p>
+            <a:pPr indent="0" lvl="0" marL="0" marR="0" rtl="0" algn="l">
+              <a:spcBef>
+                <a:spcPts val="0"/>
+              </a:spcBef>
+              <a:spcAft>
+                <a:spcPts val="0"/>
+              </a:spcAft>
+              <a:buClr>
+                <a:srgbClr val="D9A441"/>
+              </a:buClr>
+              <a:buSzPts val="1700"/>
+              <a:buFont typeface="Tahoma"/>
+              <a:buNone/>
+            </a:pPr>
+            <a:r>
+              <a:rPr b="1" i="0" lang="en-US" sz="1700" u="none" cap="none" strike="noStrike">
+                <a:solidFill>
+                  <a:srgbClr val="D9A441"/>
+                </a:solidFill>
+                <a:latin typeface="Tahoma"/>
+                <a:ea typeface="Tahoma"/>
+                <a:cs typeface="Tahoma"/>
+                <a:sym typeface="Tahoma"/>
+              </a:rPr>
+              <a:t>ตั้งแต่เปิดเกมจนเข้าห้องได้เอง</a:t>
+            </a:r>
+            <a:endParaRPr b="0" i="0" sz="1700" u="none" cap="none" strike="noStrike">
+              <a:solidFill>
+                <a:schemeClr val="dk1"/>
+              </a:solidFill>
+              <a:latin typeface="Calibri"/>
+              <a:ea typeface="Calibri"/>
+              <a:cs typeface="Calibri"/>
+              <a:sym typeface="Calibri"/>
+            </a:endParaRPr>
+          </a:p>
+        </p:txBody>
+      </p:sp>
+      <p:sp>
+        <p:nvSpPr>
+          <p:cNvPr id="125" name="Google Shape;125;p8"/>
+          <p:cNvSpPr txBox="1"/>
+          <p:nvPr/>
+        </p:nvSpPr>
+        <p:spPr>
+          <a:xfrm>
+            <a:off x="868680" y="2468880"/>
+            <a:ext cx="10424160" cy="1188720"/>
+          </a:xfrm>
+          <a:prstGeom prst="rect">
+            <a:avLst/>
+          </a:prstGeom>
+          <a:noFill/>
+          <a:ln>
+            <a:noFill/>
+          </a:ln>
+        </p:spPr>
+        <p:txBody>
+          <a:bodyPr anchorCtr="0" anchor="t" bIns="0" lIns="0" spcFirstLastPara="1" rIns="0" wrap="square" tIns="0">
+            <a:noAutofit/>
+          </a:bodyPr>
+          <a:lstStyle/>
+          <a:p>
+            <a:pPr indent="-342900" lvl="0" marL="342900" marR="0" rtl="0" algn="l">
+              <a:spcBef>
+                <a:spcPts val="0"/>
+              </a:spcBef>
+              <a:spcAft>
+                <a:spcPts val="0"/>
+              </a:spcAft>
+              <a:buClr>
+                <a:srgbClr val="F4EFED"/>
+              </a:buClr>
+              <a:buSzPts val="1250"/>
+              <a:buFont typeface="Tahoma"/>
+              <a:buChar char="•"/>
+            </a:pPr>
+            <a:r>
+              <a:rPr b="0" i="0" lang="en-US" sz="1250" u="none" cap="none" strike="noStrike">
+                <a:solidFill>
+                  <a:srgbClr val="F4EFED"/>
+                </a:solidFill>
+                <a:latin typeface="Tahoma"/>
+                <a:ea typeface="Tahoma"/>
+                <a:cs typeface="Tahoma"/>
+                <a:sym typeface="Tahoma"/>
+              </a:rPr>
+              <a:t>เมนูหลัก: สร้างห้อง (แผนที่ ความยาก 1 – 6 คน รหัสผ่าน) / ค้นหาห้อง / เข้าห้องด่วน</a:t>
+            </a:r>
+            <a:endParaRPr b="0" i="0" sz="1250" u="none" cap="none" strike="noStrike">
+              <a:solidFill>
+                <a:schemeClr val="dk1"/>
+              </a:solidFill>
+              <a:latin typeface="Calibri"/>
+              <a:ea typeface="Calibri"/>
+              <a:cs typeface="Calibri"/>
+              <a:sym typeface="Calibri"/>
+            </a:endParaRPr>
+          </a:p>
+          <a:p>
+            <a:pPr indent="-342900" lvl="0" marL="342900" marR="0" rtl="0" algn="l">
+              <a:spcBef>
+                <a:spcPts val="700"/>
+              </a:spcBef>
+              <a:spcAft>
+                <a:spcPts val="0"/>
+              </a:spcAft>
+              <a:buClr>
+                <a:srgbClr val="F4EFED"/>
+              </a:buClr>
+              <a:buSzPts val="1250"/>
+              <a:buFont typeface="Tahoma"/>
+              <a:buChar char="•"/>
+            </a:pPr>
+            <a:r>
+              <a:rPr b="0" i="0" lang="en-US" sz="1250" u="none" cap="none" strike="noStrike">
+                <a:solidFill>
+                  <a:srgbClr val="F4EFED"/>
+                </a:solidFill>
+                <a:latin typeface="Tahoma"/>
+                <a:ea typeface="Tahoma"/>
+                <a:cs typeface="Tahoma"/>
+                <a:sym typeface="Tahoma"/>
+              </a:rPr>
+              <a:t>ห้องรอ: ผู้เล่นกด Ready แล้ว Host กด Start — ออกจากห้องแล้วปิดห้อง EOS ด้วย ไม่มีห้องค้างในรายการ</a:t>
+            </a:r>
+            <a:endParaRPr b="0" i="0" sz="1250" u="none" cap="none" strike="noStrike">
+              <a:solidFill>
+                <a:schemeClr val="dk1"/>
+              </a:solidFill>
+              <a:latin typeface="Calibri"/>
+              <a:ea typeface="Calibri"/>
+              <a:cs typeface="Calibri"/>
+              <a:sym typeface="Calibri"/>
+            </a:endParaRPr>
+          </a:p>
+          <a:p>
+            <a:pPr indent="-342900" lvl="0" marL="342900" marR="0" rtl="0" algn="l">
+              <a:spcBef>
+                <a:spcPts val="700"/>
+              </a:spcBef>
+              <a:spcAft>
+                <a:spcPts val="0"/>
+              </a:spcAft>
+              <a:buClr>
+                <a:srgbClr val="F4EFED"/>
+              </a:buClr>
+              <a:buSzPts val="1250"/>
+              <a:buFont typeface="Tahoma"/>
+              <a:buChar char="•"/>
+            </a:pPr>
+            <a:r>
+              <a:rPr b="0" i="0" lang="en-US" sz="1250" u="none" cap="none" strike="noStrike">
+                <a:solidFill>
+                  <a:srgbClr val="F4EFED"/>
+                </a:solidFill>
+                <a:latin typeface="Tahoma"/>
+                <a:ea typeface="Tahoma"/>
+                <a:cs typeface="Tahoma"/>
+                <a:sym typeface="Tahoma"/>
+              </a:rPr>
+              <a:t>เมนู Esc และการตั้งค่า: ความสว่าง เสียงแยก 4 หมวด เปลี่ยนปุ่มได้ และต้องกด Apply ถึงจะบันทึก</a:t>
+            </a:r>
+            <a:endParaRPr b="0" i="0" sz="1250" u="none" cap="none" strike="noStrike">
+              <a:solidFill>
+                <a:schemeClr val="dk1"/>
+              </a:solidFill>
+              <a:latin typeface="Calibri"/>
+              <a:ea typeface="Calibri"/>
+              <a:cs typeface="Calibri"/>
+              <a:sym typeface="Calibri"/>
+            </a:endParaRPr>
+          </a:p>
+        </p:txBody>
+      </p:sp>
+      <p:sp>
+        <p:nvSpPr>
+          <p:cNvPr id="126" name="Google Shape;126;p8"/>
+          <p:cNvSpPr/>
+          <p:nvPr/>
+        </p:nvSpPr>
+        <p:spPr>
+          <a:xfrm>
+            <a:off x="548640" y="3977640"/>
+            <a:ext cx="11064240" cy="1783080"/>
+          </a:xfrm>
+          <a:prstGeom prst="roundRect">
+            <a:avLst>
+              <a:gd fmla="val 4103" name="adj"/>
+            </a:avLst>
+          </a:prstGeom>
+          <a:solidFill>
+            <a:srgbClr val="241C1A"/>
+          </a:solidFill>
+          <a:ln cap="flat" cmpd="sng" w="12700">
+            <a:solidFill>
+              <a:srgbClr val="3A2F2C"/>
+            </a:solidFill>
+            <a:prstDash val="solid"/>
+            <a:round/>
+            <a:headEnd len="sm" w="sm" type="none"/>
+            <a:tailEnd len="sm" w="sm" type="none"/>
+          </a:ln>
+        </p:spPr>
+        <p:txBody>
+          <a:bodyPr anchorCtr="0" anchor="ctr" bIns="91425" lIns="91425" spcFirstLastPara="1" rIns="91425" wrap="square" tIns="91425">
+            <a:noAutofit/>
+          </a:bodyPr>
+          <a:lstStyle/>
+          <a:p>
+            <a:pPr indent="0" lvl="0" marL="0" rtl="0" algn="l">
+              <a:spcBef>
+                <a:spcPts val="0"/>
+              </a:spcBef>
+              <a:spcAft>
+                <a:spcPts val="0"/>
+              </a:spcAft>
+              <a:buNone/>
+            </a:pPr>
+            <a:r>
+              <a:t/>
+            </a:r>
+            <a:endParaRPr/>
+          </a:p>
+        </p:txBody>
+      </p:sp>
+      <p:sp>
+        <p:nvSpPr>
+          <p:cNvPr id="127" name="Google Shape;127;p8"/>
+          <p:cNvSpPr txBox="1"/>
+          <p:nvPr/>
+        </p:nvSpPr>
+        <p:spPr>
+          <a:xfrm>
+            <a:off x="868680" y="4160520"/>
+            <a:ext cx="10424160" cy="365760"/>
+          </a:xfrm>
+          <a:prstGeom prst="rect">
+            <a:avLst/>
+          </a:prstGeom>
+          <a:noFill/>
+          <a:ln>
+            <a:noFill/>
+          </a:ln>
+        </p:spPr>
+        <p:txBody>
+          <a:bodyPr anchorCtr="0" anchor="ctr" bIns="0" lIns="0" spcFirstLastPara="1" rIns="0" wrap="square" tIns="0">
+            <a:noAutofit/>
+          </a:bodyPr>
+          <a:lstStyle/>
+          <a:p>
+            <a:pPr indent="0" lvl="0" marL="0" marR="0" rtl="0" algn="l">
+              <a:spcBef>
+                <a:spcPts val="0"/>
+              </a:spcBef>
+              <a:spcAft>
+                <a:spcPts val="0"/>
+              </a:spcAft>
+              <a:buClr>
+                <a:srgbClr val="D9A441"/>
+              </a:buClr>
+              <a:buSzPts val="1700"/>
+              <a:buFont typeface="Tahoma"/>
+              <a:buNone/>
+            </a:pPr>
+            <a:r>
+              <a:rPr b="1" i="0" lang="en-US" sz="1700" u="none" cap="none" strike="noStrike">
+                <a:solidFill>
+                  <a:srgbClr val="D9A441"/>
+                </a:solidFill>
+                <a:latin typeface="Tahoma"/>
+                <a:ea typeface="Tahoma"/>
+                <a:cs typeface="Tahoma"/>
+                <a:sym typeface="Tahoma"/>
+              </a:rPr>
+              <a:t>จุดที่ตัดสินใจ</a:t>
+            </a:r>
+            <a:endParaRPr b="0" i="0" sz="1700" u="none" cap="none" strike="noStrike">
+              <a:solidFill>
+                <a:schemeClr val="dk1"/>
+              </a:solidFill>
+              <a:latin typeface="Calibri"/>
+              <a:ea typeface="Calibri"/>
+              <a:cs typeface="Calibri"/>
+              <a:sym typeface="Calibri"/>
+            </a:endParaRPr>
+          </a:p>
+        </p:txBody>
+      </p:sp>
+      <p:sp>
+        <p:nvSpPr>
+          <p:cNvPr id="128" name="Google Shape;128;p8"/>
+          <p:cNvSpPr txBox="1"/>
+          <p:nvPr/>
+        </p:nvSpPr>
+        <p:spPr>
+          <a:xfrm>
+            <a:off x="868680" y="4572000"/>
+            <a:ext cx="10424160" cy="1005840"/>
+          </a:xfrm>
+          <a:prstGeom prst="rect">
+            <a:avLst/>
+          </a:prstGeom>
+          <a:noFill/>
+          <a:ln>
+            <a:noFill/>
+          </a:ln>
+        </p:spPr>
+        <p:txBody>
+          <a:bodyPr anchorCtr="0" anchor="t" bIns="0" lIns="0" spcFirstLastPara="1" rIns="0" wrap="square" tIns="0">
+            <a:noAutofit/>
+          </a:bodyPr>
+          <a:lstStyle/>
+          <a:p>
+            <a:pPr indent="0" lvl="0" marL="0" marR="0" rtl="0" algn="l">
+              <a:lnSpc>
+                <a:spcPct val="135000"/>
+              </a:lnSpc>
+              <a:spcBef>
+                <a:spcPts val="0"/>
+              </a:spcBef>
+              <a:spcAft>
+                <a:spcPts val="0"/>
+              </a:spcAft>
+              <a:buClr>
+                <a:srgbClr val="9A8F8B"/>
+              </a:buClr>
+              <a:buSzPts val="1250"/>
+              <a:buFont typeface="Tahoma"/>
+              <a:buNone/>
+            </a:pPr>
+            <a:r>
+              <a:rPr b="0" i="0" lang="en-US" sz="1250" u="none" cap="none" strike="noStrike">
+                <a:solidFill>
+                  <a:srgbClr val="9A8F8B"/>
+                </a:solidFill>
+                <a:latin typeface="Tahoma"/>
+                <a:ea typeface="Tahoma"/>
+                <a:cs typeface="Tahoma"/>
+                <a:sym typeface="Tahoma"/>
+              </a:rPr>
+              <a:t>เกมออนไลน์หยุดเวลาไม่ได้ — เมนู Esc จึงแค่ล็อกการควบคุมของเราและปิดไมค์ ไม่หยุดเกมของเพื่อน</a:t>
+            </a:r>
+            <a:endParaRPr b="0" i="0" sz="1250" u="none" cap="none" strike="noStrike">
+              <a:solidFill>
+                <a:schemeClr val="dk1"/>
+              </a:solidFill>
+              <a:latin typeface="Calibri"/>
+              <a:ea typeface="Calibri"/>
+              <a:cs typeface="Calibri"/>
+              <a:sym typeface="Calibri"/>
+            </a:endParaRPr>
+          </a:p>
+          <a:p>
+            <a:pPr indent="0" lvl="0" marL="0" marR="0" rtl="0" algn="l">
+              <a:lnSpc>
+                <a:spcPct val="135000"/>
+              </a:lnSpc>
+              <a:spcBef>
+                <a:spcPts val="0"/>
+              </a:spcBef>
+              <a:spcAft>
+                <a:spcPts val="0"/>
+              </a:spcAft>
+              <a:buClr>
+                <a:srgbClr val="9A8F8B"/>
+              </a:buClr>
+              <a:buSzPts val="1250"/>
+              <a:buFont typeface="Tahoma"/>
+              <a:buNone/>
+            </a:pPr>
+            <a:r>
+              <a:rPr b="0" i="0" lang="en-US" sz="1250" u="none" cap="none" strike="noStrike">
+                <a:solidFill>
+                  <a:srgbClr val="9A8F8B"/>
+                </a:solidFill>
+                <a:latin typeface="Tahoma"/>
+                <a:ea typeface="Tahoma"/>
+                <a:cs typeface="Tahoma"/>
+                <a:sym typeface="Tahoma"/>
+              </a:rPr>
+              <a:t>รหัสผ่านห้องให้ Host ตรวจหลังเชื่อมต่อ ไม่เก็บไว้บน EOS และบอกเหตุผลชัดเจน: รหัสผิด / ห้องเต็ม / เกมเริ่มไปแล้ว</a:t>
+            </a:r>
+            <a:endParaRPr b="0" i="0" sz="1250" u="none" cap="none" strike="noStrike">
+              <a:solidFill>
+                <a:schemeClr val="dk1"/>
+              </a:solidFill>
+              <a:latin typeface="Calibri"/>
+              <a:ea typeface="Calibri"/>
+              <a:cs typeface="Calibri"/>
+              <a:sym typeface="Calibri"/>
+            </a:endParaRPr>
+          </a:p>
+        </p:txBody>
+      </p:sp>
+      <p:sp>
+        <p:nvSpPr>
+          <p:cNvPr id="129" name="Google Shape;129;p8"/>
+          <p:cNvSpPr txBox="1"/>
+          <p:nvPr/>
+        </p:nvSpPr>
+        <p:spPr>
+          <a:xfrm>
+            <a:off x="548640" y="6327648"/>
+            <a:ext cx="11064240" cy="274320"/>
+          </a:xfrm>
+          <a:prstGeom prst="rect">
+            <a:avLst/>
+          </a:prstGeom>
+          <a:noFill/>
+          <a:ln>
+            <a:noFill/>
+          </a:ln>
+        </p:spPr>
+        <p:txBody>
+          <a:bodyPr anchorCtr="0" anchor="ctr" bIns="0" lIns="0" spcFirstLastPara="1" rIns="0" wrap="square" tIns="0">
+            <a:noAutofit/>
+          </a:bodyPr>
+          <a:lstStyle/>
+          <a:p>
+            <a:pPr indent="0" lvl="0" marL="0" marR="0" rtl="0" algn="l">
+              <a:spcBef>
+                <a:spcPts val="0"/>
+              </a:spcBef>
+              <a:spcAft>
+                <a:spcPts val="0"/>
+              </a:spcAft>
+              <a:buClr>
+                <a:srgbClr val="9A8F8B"/>
+              </a:buClr>
+              <a:buSzPts val="900"/>
+              <a:buFont typeface="Tahoma"/>
+              <a:buNone/>
+            </a:pPr>
+            <a:r>
+              <a:rPr b="0" i="0" lang="en-US" sz="900" u="none" cap="none" strike="noStrike">
+                <a:solidFill>
+                  <a:srgbClr val="9A8F8B"/>
+                </a:solidFill>
+                <a:latin typeface="Tahoma"/>
+                <a:ea typeface="Tahoma"/>
+                <a:cs typeface="Tahoma"/>
+                <a:sym typeface="Tahoma"/>
+              </a:rPr>
+              <a:t>3,432 บรรทัด · 17 ไฟล์ · สร้างเมนูทั้งหมดได้ในคลิกเดียวจาก Editor</a:t>
+            </a:r>
+            <a:endParaRPr b="0" i="0" sz="900" u="none" cap="none" strike="noStrike">
+              <a:solidFill>
+                <a:schemeClr val="dk1"/>
+              </a:solidFill>
+              <a:latin typeface="Calibri"/>
+              <a:ea typeface="Calibri"/>
+              <a:cs typeface="Calibri"/>
+              <a:sym typeface="Calibri"/>
+            </a:endParaRPr>
+          </a:p>
+        </p:txBody>
+      </p:sp>
+    </p:spTree>
+  </p:cSld>
+  <p:clrMapOvr>
+    <a:masterClrMapping/>
+  </p:clrMapOvr>
+</p:sld>
+</file>
+
+<file path=ppt/slides/slide16.xml><?xml version="1.0" encoding="utf-8"?>
+<p:sld xmlns:a="http://schemas.openxmlformats.org/drawingml/2006/main" xmlns:r="http://schemas.openxmlformats.org/officeDocument/2006/relationships" xmlns:mc="http://schemas.openxmlformats.org/markup-compatibility/2006" xmlns:mv="urn:schemas-microsoft-com:mac:vml" xmlns:p="http://schemas.openxmlformats.org/presentationml/2006/main" xmlns:c="http://schemas.openxmlformats.org/drawingml/2006/chart" xmlns:dgm="http://schemas.openxmlformats.org/drawingml/2006/diagram" xmlns:o="urn:schemas-microsoft-com:office:office" xmlns:v="urn:schemas-microsoft-com:vml" xmlns:pvml="urn:schemas-microsoft-com:office:powerpoint" xmlns:com="http://schemas.openxmlformats.org/drawingml/2006/compatibility" xmlns:p14="http://schemas.microsoft.com/office/powerpoint/2010/main" xmlns:p15="http://schemas.microsoft.com/office/powerpoint/2012/main" xmlns:ahyp="http://schemas.microsoft.com/office/drawing/2018/hyperlinkcolor">
+  <p:cSld>
+    <p:bg>
+      <p:bgPr>
+        <a:solidFill>
+          <a:srgbClr val="15110F"/>
+        </a:solidFill>
+      </p:bgPr>
+    </p:bg>
+    <p:spTree>
+      <p:nvGrpSpPr>
+        <p:cNvPr id="159" name="Shape 159"/>
+        <p:cNvGrpSpPr/>
+        <p:nvPr/>
+      </p:nvGrpSpPr>
+      <p:grpSpPr>
+        <a:xfrm>
+          <a:off x="0" y="0"/>
+          <a:ext cx="0" cy="0"/>
+          <a:chOff x="0" y="0"/>
+          <a:chExt cx="0" cy="0"/>
+        </a:xfrm>
+      </p:grpSpPr>
+      <p:sp>
+        <p:nvSpPr>
+          <p:cNvPr id="160" name="Google Shape;160;p10"/>
+          <p:cNvSpPr txBox="1"/>
+          <p:nvPr/>
+        </p:nvSpPr>
+        <p:spPr>
+          <a:xfrm>
+            <a:off x="548640" y="411480"/>
+            <a:ext cx="11064240" cy="777240"/>
+          </a:xfrm>
+          <a:prstGeom prst="rect">
+            <a:avLst/>
+          </a:prstGeom>
+          <a:noFill/>
+          <a:ln>
+            <a:noFill/>
+          </a:ln>
+        </p:spPr>
+        <p:txBody>
+          <a:bodyPr anchorCtr="0" anchor="ctr" bIns="0" lIns="0" spcFirstLastPara="1" rIns="0" wrap="square" tIns="0">
+            <a:noAutofit/>
+          </a:bodyPr>
+          <a:lstStyle/>
+          <a:p>
+            <a:pPr indent="0" lvl="0" marL="0" marR="0" rtl="0" algn="l">
+              <a:spcBef>
+                <a:spcPts val="0"/>
+              </a:spcBef>
+              <a:spcAft>
+                <a:spcPts val="0"/>
+              </a:spcAft>
+              <a:buClr>
+                <a:srgbClr val="F4EFED"/>
+              </a:buClr>
+              <a:buSzPts val="3200"/>
+              <a:buFont typeface="Tahoma"/>
+              <a:buNone/>
+            </a:pPr>
+            <a:r>
+              <a:rPr b="1" i="0" lang="en-US" sz="3200" u="none" cap="none" strike="noStrike">
+                <a:solidFill>
+                  <a:srgbClr val="F4EFED"/>
+                </a:solidFill>
+                <a:latin typeface="Tahoma"/>
+                <a:ea typeface="Tahoma"/>
+                <a:cs typeface="Tahoma"/>
+                <a:sym typeface="Tahoma"/>
+              </a:rPr>
+              <a:t>9. เสียงพูด 3D และวิทยุสื่อสาร</a:t>
+            </a:r>
+            <a:endParaRPr b="0" i="0" sz="3200" u="none" cap="none" strike="noStrike">
+              <a:solidFill>
+                <a:schemeClr val="dk1"/>
+              </a:solidFill>
+              <a:latin typeface="Calibri"/>
+              <a:ea typeface="Calibri"/>
+              <a:cs typeface="Calibri"/>
+              <a:sym typeface="Calibri"/>
+            </a:endParaRPr>
+          </a:p>
+        </p:txBody>
+      </p:sp>
+      <p:sp>
+        <p:nvSpPr>
+          <p:cNvPr id="161" name="Google Shape;161;p10"/>
+          <p:cNvSpPr txBox="1"/>
+          <p:nvPr/>
+        </p:nvSpPr>
+        <p:spPr>
+          <a:xfrm>
+            <a:off x="548640" y="1170432"/>
+            <a:ext cx="11064240" cy="384048"/>
+          </a:xfrm>
+          <a:prstGeom prst="rect">
+            <a:avLst/>
+          </a:prstGeom>
+          <a:noFill/>
+          <a:ln>
+            <a:noFill/>
+          </a:ln>
+        </p:spPr>
+        <p:txBody>
+          <a:bodyPr anchorCtr="0" anchor="ctr" bIns="0" lIns="0" spcFirstLastPara="1" rIns="0" wrap="square" tIns="0">
+            <a:noAutofit/>
+          </a:bodyPr>
+          <a:lstStyle/>
+          <a:p>
+            <a:pPr indent="0" lvl="0" marL="0" marR="0" rtl="0" algn="l">
+              <a:spcBef>
+                <a:spcPts val="0"/>
+              </a:spcBef>
+              <a:spcAft>
+                <a:spcPts val="0"/>
+              </a:spcAft>
+              <a:buClr>
+                <a:srgbClr val="D9A441"/>
+              </a:buClr>
+              <a:buSzPts val="1400"/>
+              <a:buFont typeface="Tahoma"/>
+              <a:buNone/>
+            </a:pPr>
+            <a:r>
+              <a:rPr b="0" i="0" lang="en-US" sz="1400" u="none" cap="none" strike="noStrike">
+                <a:solidFill>
+                  <a:srgbClr val="D9A441"/>
+                </a:solidFill>
+                <a:latin typeface="Tahoma"/>
+                <a:ea typeface="Tahoma"/>
+                <a:cs typeface="Tahoma"/>
+                <a:sym typeface="Tahoma"/>
+              </a:rPr>
+              <a:t>สัปดาห์ที่ 5  ·  ผมเขียนเองทั้งหมด</a:t>
+            </a:r>
+            <a:endParaRPr b="0" i="0" sz="1400" u="none" cap="none" strike="noStrike">
+              <a:solidFill>
+                <a:schemeClr val="dk1"/>
+              </a:solidFill>
+              <a:latin typeface="Calibri"/>
+              <a:ea typeface="Calibri"/>
+              <a:cs typeface="Calibri"/>
+              <a:sym typeface="Calibri"/>
+            </a:endParaRPr>
+          </a:p>
+        </p:txBody>
+      </p:sp>
+      <p:sp>
+        <p:nvSpPr>
+          <p:cNvPr id="162" name="Google Shape;162;p10"/>
+          <p:cNvSpPr/>
+          <p:nvPr/>
+        </p:nvSpPr>
+        <p:spPr>
+          <a:xfrm>
+            <a:off x="548640" y="1828800"/>
+            <a:ext cx="5486400" cy="2011680"/>
+          </a:xfrm>
+          <a:prstGeom prst="roundRect">
+            <a:avLst>
+              <a:gd fmla="val 3636" name="adj"/>
+            </a:avLst>
+          </a:prstGeom>
+          <a:solidFill>
+            <a:srgbClr val="241C1A"/>
+          </a:solidFill>
+          <a:ln cap="flat" cmpd="sng" w="12700">
+            <a:solidFill>
+              <a:srgbClr val="3A2F2C"/>
+            </a:solidFill>
+            <a:prstDash val="solid"/>
+            <a:round/>
+            <a:headEnd len="sm" w="sm" type="none"/>
+            <a:tailEnd len="sm" w="sm" type="none"/>
+          </a:ln>
+        </p:spPr>
+        <p:txBody>
+          <a:bodyPr anchorCtr="0" anchor="ctr" bIns="91425" lIns="91425" spcFirstLastPara="1" rIns="91425" wrap="square" tIns="91425">
+            <a:noAutofit/>
+          </a:bodyPr>
+          <a:lstStyle/>
+          <a:p>
+            <a:pPr indent="0" lvl="0" marL="0" rtl="0" algn="l">
+              <a:spcBef>
+                <a:spcPts val="0"/>
+              </a:spcBef>
+              <a:spcAft>
+                <a:spcPts val="0"/>
+              </a:spcAft>
+              <a:buNone/>
+            </a:pPr>
+            <a:r>
+              <a:t/>
+            </a:r>
+            <a:endParaRPr/>
+          </a:p>
+        </p:txBody>
+      </p:sp>
+      <p:sp>
+        <p:nvSpPr>
+          <p:cNvPr id="163" name="Google Shape;163;p10"/>
+          <p:cNvSpPr txBox="1"/>
+          <p:nvPr/>
+        </p:nvSpPr>
+        <p:spPr>
+          <a:xfrm>
+            <a:off x="868680" y="2011680"/>
+            <a:ext cx="4846320" cy="365760"/>
+          </a:xfrm>
+          <a:prstGeom prst="rect">
+            <a:avLst/>
+          </a:prstGeom>
+          <a:noFill/>
+          <a:ln>
+            <a:noFill/>
+          </a:ln>
+        </p:spPr>
+        <p:txBody>
+          <a:bodyPr anchorCtr="0" anchor="ctr" bIns="0" lIns="0" spcFirstLastPara="1" rIns="0" wrap="square" tIns="0">
+            <a:noAutofit/>
+          </a:bodyPr>
+          <a:lstStyle/>
+          <a:p>
+            <a:pPr indent="0" lvl="0" marL="0" marR="0" rtl="0" algn="l">
+              <a:spcBef>
+                <a:spcPts val="0"/>
+              </a:spcBef>
+              <a:spcAft>
+                <a:spcPts val="0"/>
+              </a:spcAft>
+              <a:buClr>
+                <a:srgbClr val="D9A441"/>
+              </a:buClr>
+              <a:buSzPts val="1600"/>
+              <a:buFont typeface="Tahoma"/>
+              <a:buNone/>
+            </a:pPr>
+            <a:r>
+              <a:rPr b="1" i="0" lang="en-US" sz="1600" u="none" cap="none" strike="noStrike">
+                <a:solidFill>
+                  <a:srgbClr val="D9A441"/>
+                </a:solidFill>
+                <a:latin typeface="Tahoma"/>
+                <a:ea typeface="Tahoma"/>
+                <a:cs typeface="Tahoma"/>
+                <a:sym typeface="Tahoma"/>
+              </a:rPr>
+              <a:t>ปัญหา</a:t>
+            </a:r>
+            <a:endParaRPr b="0" i="0" sz="1600" u="none" cap="none" strike="noStrike">
+              <a:solidFill>
+                <a:schemeClr val="dk1"/>
+              </a:solidFill>
+              <a:latin typeface="Calibri"/>
+              <a:ea typeface="Calibri"/>
+              <a:cs typeface="Calibri"/>
+              <a:sym typeface="Calibri"/>
+            </a:endParaRPr>
+          </a:p>
+        </p:txBody>
+      </p:sp>
+      <p:sp>
+        <p:nvSpPr>
+          <p:cNvPr id="164" name="Google Shape;164;p10"/>
+          <p:cNvSpPr txBox="1"/>
+          <p:nvPr/>
+        </p:nvSpPr>
+        <p:spPr>
+          <a:xfrm>
+            <a:off x="868680" y="2423160"/>
+            <a:ext cx="4846320" cy="1234440"/>
+          </a:xfrm>
+          <a:prstGeom prst="rect">
+            <a:avLst/>
+          </a:prstGeom>
+          <a:noFill/>
+          <a:ln>
+            <a:noFill/>
+          </a:ln>
+        </p:spPr>
+        <p:txBody>
+          <a:bodyPr anchorCtr="0" anchor="t" bIns="0" lIns="0" spcFirstLastPara="1" rIns="0" wrap="square" tIns="0">
+            <a:noAutofit/>
+          </a:bodyPr>
+          <a:lstStyle/>
+          <a:p>
+            <a:pPr indent="0" lvl="0" marL="0" marR="0" rtl="0" algn="l">
+              <a:lnSpc>
+                <a:spcPct val="130000"/>
+              </a:lnSpc>
+              <a:spcBef>
+                <a:spcPts val="0"/>
+              </a:spcBef>
+              <a:spcAft>
+                <a:spcPts val="0"/>
+              </a:spcAft>
+              <a:buClr>
+                <a:srgbClr val="9A8F8B"/>
+              </a:buClr>
+              <a:buSzPts val="1200"/>
+              <a:buFont typeface="Tahoma"/>
+              <a:buNone/>
+            </a:pPr>
+            <a:r>
+              <a:rPr b="0" i="0" lang="en-US" sz="1200" u="none" cap="none" strike="noStrike">
+                <a:solidFill>
+                  <a:srgbClr val="9A8F8B"/>
+                </a:solidFill>
+                <a:latin typeface="Tahoma"/>
+                <a:ea typeface="Tahoma"/>
+                <a:cs typeface="Tahoma"/>
+                <a:sym typeface="Tahoma"/>
+              </a:rPr>
+              <a:t>ต่อระบบเสียงของ Epic แล้วทุกคนเข้าห้องเสียงได้ แต่ไม่มีใครได้ยินใคร</a:t>
+            </a:r>
+            <a:endParaRPr b="0" i="0" sz="1200" u="none" cap="none" strike="noStrike">
+              <a:solidFill>
+                <a:schemeClr val="dk1"/>
+              </a:solidFill>
+              <a:latin typeface="Calibri"/>
+              <a:ea typeface="Calibri"/>
+              <a:cs typeface="Calibri"/>
+              <a:sym typeface="Calibri"/>
+            </a:endParaRPr>
+          </a:p>
+          <a:p>
+            <a:pPr indent="0" lvl="0" marL="0" marR="0" rtl="0" algn="l">
+              <a:lnSpc>
+                <a:spcPct val="130000"/>
+              </a:lnSpc>
+              <a:spcBef>
+                <a:spcPts val="0"/>
+              </a:spcBef>
+              <a:spcAft>
+                <a:spcPts val="0"/>
+              </a:spcAft>
+              <a:buClr>
+                <a:srgbClr val="9A8F8B"/>
+              </a:buClr>
+              <a:buSzPts val="1200"/>
+              <a:buFont typeface="Tahoma"/>
+              <a:buNone/>
+            </a:pPr>
+            <a:r>
+              <a:rPr b="0" i="0" lang="en-US" sz="1200" u="none" cap="none" strike="noStrike">
+                <a:solidFill>
+                  <a:srgbClr val="9A8F8B"/>
+                </a:solidFill>
+                <a:latin typeface="Tahoma"/>
+                <a:ea typeface="Tahoma"/>
+                <a:cs typeface="Tahoma"/>
+                <a:sym typeface="Tahoma"/>
+              </a:rPr>
+              <a:t>EOS SDK เวอร์ชันที่ใช้ไม่ส่งเสียงให้ตัวเกม จึงทำเสียง 3D และวิทยุไม่ได้</a:t>
+            </a:r>
+            <a:endParaRPr b="0" i="0" sz="1200" u="none" cap="none" strike="noStrike">
+              <a:solidFill>
+                <a:schemeClr val="dk1"/>
+              </a:solidFill>
+              <a:latin typeface="Calibri"/>
+              <a:ea typeface="Calibri"/>
+              <a:cs typeface="Calibri"/>
+              <a:sym typeface="Calibri"/>
+            </a:endParaRPr>
+          </a:p>
+        </p:txBody>
+      </p:sp>
+      <p:sp>
+        <p:nvSpPr>
+          <p:cNvPr id="165" name="Google Shape;165;p10"/>
+          <p:cNvSpPr/>
+          <p:nvPr/>
+        </p:nvSpPr>
+        <p:spPr>
+          <a:xfrm>
+            <a:off x="6309360" y="1828800"/>
+            <a:ext cx="5303520" cy="2011680"/>
+          </a:xfrm>
+          <a:prstGeom prst="roundRect">
+            <a:avLst>
+              <a:gd fmla="val 3636" name="adj"/>
+            </a:avLst>
+          </a:prstGeom>
+          <a:solidFill>
+            <a:srgbClr val="241C1A"/>
+          </a:solidFill>
+          <a:ln cap="flat" cmpd="sng" w="12700">
+            <a:solidFill>
+              <a:srgbClr val="3A2F2C"/>
+            </a:solidFill>
+            <a:prstDash val="solid"/>
+            <a:round/>
+            <a:headEnd len="sm" w="sm" type="none"/>
+            <a:tailEnd len="sm" w="sm" type="none"/>
+          </a:ln>
+        </p:spPr>
+        <p:txBody>
+          <a:bodyPr anchorCtr="0" anchor="ctr" bIns="91425" lIns="91425" spcFirstLastPara="1" rIns="91425" wrap="square" tIns="91425">
+            <a:noAutofit/>
+          </a:bodyPr>
+          <a:lstStyle/>
+          <a:p>
+            <a:pPr indent="0" lvl="0" marL="0" rtl="0" algn="l">
+              <a:spcBef>
+                <a:spcPts val="0"/>
+              </a:spcBef>
+              <a:spcAft>
+                <a:spcPts val="0"/>
+              </a:spcAft>
+              <a:buNone/>
+            </a:pPr>
+            <a:r>
+              <a:t/>
+            </a:r>
+            <a:endParaRPr/>
+          </a:p>
+        </p:txBody>
+      </p:sp>
+      <p:sp>
+        <p:nvSpPr>
+          <p:cNvPr id="166" name="Google Shape;166;p10"/>
+          <p:cNvSpPr txBox="1"/>
+          <p:nvPr/>
+        </p:nvSpPr>
+        <p:spPr>
+          <a:xfrm>
+            <a:off x="6629400" y="2011680"/>
+            <a:ext cx="4663440" cy="365760"/>
+          </a:xfrm>
+          <a:prstGeom prst="rect">
+            <a:avLst/>
+          </a:prstGeom>
+          <a:noFill/>
+          <a:ln>
+            <a:noFill/>
+          </a:ln>
+        </p:spPr>
+        <p:txBody>
+          <a:bodyPr anchorCtr="0" anchor="ctr" bIns="0" lIns="0" spcFirstLastPara="1" rIns="0" wrap="square" tIns="0">
+            <a:noAutofit/>
+          </a:bodyPr>
+          <a:lstStyle/>
+          <a:p>
+            <a:pPr indent="0" lvl="0" marL="0" marR="0" rtl="0" algn="l">
+              <a:spcBef>
+                <a:spcPts val="0"/>
+              </a:spcBef>
+              <a:spcAft>
+                <a:spcPts val="0"/>
+              </a:spcAft>
+              <a:buClr>
+                <a:srgbClr val="D9A441"/>
+              </a:buClr>
+              <a:buSzPts val="1600"/>
+              <a:buFont typeface="Tahoma"/>
+              <a:buNone/>
+            </a:pPr>
+            <a:r>
+              <a:rPr b="1" i="0" lang="en-US" sz="1600" u="none" cap="none" strike="noStrike">
+                <a:solidFill>
+                  <a:srgbClr val="D9A441"/>
+                </a:solidFill>
+                <a:latin typeface="Tahoma"/>
+                <a:ea typeface="Tahoma"/>
+                <a:cs typeface="Tahoma"/>
+                <a:sym typeface="Tahoma"/>
+              </a:rPr>
+              <a:t>ทางแก้</a:t>
+            </a:r>
+            <a:endParaRPr b="0" i="0" sz="1600" u="none" cap="none" strike="noStrike">
+              <a:solidFill>
+                <a:schemeClr val="dk1"/>
+              </a:solidFill>
+              <a:latin typeface="Calibri"/>
+              <a:ea typeface="Calibri"/>
+              <a:cs typeface="Calibri"/>
+              <a:sym typeface="Calibri"/>
+            </a:endParaRPr>
+          </a:p>
+        </p:txBody>
+      </p:sp>
+      <p:sp>
+        <p:nvSpPr>
+          <p:cNvPr id="167" name="Google Shape;167;p10"/>
+          <p:cNvSpPr txBox="1"/>
+          <p:nvPr/>
+        </p:nvSpPr>
+        <p:spPr>
+          <a:xfrm>
+            <a:off x="6629400" y="2423160"/>
+            <a:ext cx="4663440" cy="1234440"/>
+          </a:xfrm>
+          <a:prstGeom prst="rect">
+            <a:avLst/>
+          </a:prstGeom>
+          <a:noFill/>
+          <a:ln>
+            <a:noFill/>
+          </a:ln>
+        </p:spPr>
+        <p:txBody>
+          <a:bodyPr anchorCtr="0" anchor="t" bIns="0" lIns="0" spcFirstLastPara="1" rIns="0" wrap="square" tIns="0">
+            <a:noAutofit/>
+          </a:bodyPr>
+          <a:lstStyle/>
+          <a:p>
+            <a:pPr indent="0" lvl="0" marL="0" marR="0" rtl="0" algn="l">
+              <a:lnSpc>
+                <a:spcPct val="130000"/>
+              </a:lnSpc>
+              <a:spcBef>
+                <a:spcPts val="0"/>
+              </a:spcBef>
+              <a:spcAft>
+                <a:spcPts val="0"/>
+              </a:spcAft>
+              <a:buClr>
+                <a:srgbClr val="F4EFED"/>
+              </a:buClr>
+              <a:buSzPts val="1200"/>
+              <a:buFont typeface="Tahoma"/>
+              <a:buNone/>
+            </a:pPr>
+            <a:r>
+              <a:rPr b="0" i="0" lang="en-US" sz="1200" u="none" cap="none" strike="noStrike">
+                <a:solidFill>
+                  <a:srgbClr val="F4EFED"/>
+                </a:solidFill>
+                <a:latin typeface="Tahoma"/>
+                <a:ea typeface="Tahoma"/>
+                <a:cs typeface="Tahoma"/>
+                <a:sym typeface="Tahoma"/>
+              </a:rPr>
+              <a:t>ส่งเสียงผ่าน Mirror เอง บีบอัดและส่งเฉพาะตอนพูด (~65 kbit/s)</a:t>
+            </a:r>
+            <a:endParaRPr b="0" i="0" sz="1200" u="none" cap="none" strike="noStrike">
+              <a:solidFill>
+                <a:schemeClr val="dk1"/>
+              </a:solidFill>
+              <a:latin typeface="Calibri"/>
+              <a:ea typeface="Calibri"/>
+              <a:cs typeface="Calibri"/>
+              <a:sym typeface="Calibri"/>
+            </a:endParaRPr>
+          </a:p>
+          <a:p>
+            <a:pPr indent="0" lvl="0" marL="0" marR="0" rtl="0" algn="l">
+              <a:lnSpc>
+                <a:spcPct val="130000"/>
+              </a:lnSpc>
+              <a:spcBef>
+                <a:spcPts val="0"/>
+              </a:spcBef>
+              <a:spcAft>
+                <a:spcPts val="0"/>
+              </a:spcAft>
+              <a:buClr>
+                <a:srgbClr val="F4EFED"/>
+              </a:buClr>
+              <a:buSzPts val="1200"/>
+              <a:buFont typeface="Tahoma"/>
+              <a:buNone/>
+            </a:pPr>
+            <a:r>
+              <a:rPr b="0" i="0" lang="en-US" sz="1200" u="none" cap="none" strike="noStrike">
+                <a:solidFill>
+                  <a:srgbClr val="F4EFED"/>
+                </a:solidFill>
+                <a:latin typeface="Tahoma"/>
+                <a:ea typeface="Tahoma"/>
+                <a:cs typeface="Tahoma"/>
+                <a:sym typeface="Tahoma"/>
+              </a:rPr>
+              <a:t>Host ตัดสินว่าใครได้ยิน — อยู่ใกล้ไม่เกิน 25 เมตร หรือพกวิทยุที่เปิดอยู่</a:t>
+            </a:r>
+            <a:endParaRPr b="0" i="0" sz="1200" u="none" cap="none" strike="noStrike">
+              <a:solidFill>
+                <a:schemeClr val="dk1"/>
+              </a:solidFill>
+              <a:latin typeface="Calibri"/>
+              <a:ea typeface="Calibri"/>
+              <a:cs typeface="Calibri"/>
+              <a:sym typeface="Calibri"/>
+            </a:endParaRPr>
+          </a:p>
+        </p:txBody>
+      </p:sp>
+      <p:sp>
+        <p:nvSpPr>
+          <p:cNvPr id="168" name="Google Shape;168;p10"/>
+          <p:cNvSpPr/>
+          <p:nvPr/>
+        </p:nvSpPr>
+        <p:spPr>
+          <a:xfrm>
+            <a:off x="548640" y="4069080"/>
+            <a:ext cx="11064240" cy="2103120"/>
+          </a:xfrm>
+          <a:prstGeom prst="roundRect">
+            <a:avLst>
+              <a:gd fmla="val 4211" name="adj"/>
+            </a:avLst>
+          </a:prstGeom>
+          <a:solidFill>
+            <a:srgbClr val="241C1A"/>
+          </a:solidFill>
+          <a:ln cap="flat" cmpd="sng" w="12700">
+            <a:solidFill>
+              <a:srgbClr val="3A2F2C"/>
+            </a:solidFill>
+            <a:prstDash val="solid"/>
+            <a:round/>
+            <a:headEnd len="sm" w="sm" type="none"/>
+            <a:tailEnd len="sm" w="sm" type="none"/>
+          </a:ln>
+        </p:spPr>
+        <p:txBody>
+          <a:bodyPr anchorCtr="0" anchor="ctr" bIns="91425" lIns="91425" spcFirstLastPara="1" rIns="91425" wrap="square" tIns="91425">
+            <a:noAutofit/>
+          </a:bodyPr>
+          <a:lstStyle/>
+          <a:p>
+            <a:pPr indent="0" lvl="0" marL="0" rtl="0" algn="l">
+              <a:spcBef>
+                <a:spcPts val="0"/>
+              </a:spcBef>
+              <a:spcAft>
+                <a:spcPts val="0"/>
+              </a:spcAft>
+              <a:buNone/>
+            </a:pPr>
+            <a:r>
+              <a:t/>
+            </a:r>
+            <a:endParaRPr/>
+          </a:p>
+        </p:txBody>
+      </p:sp>
+      <p:sp>
+        <p:nvSpPr>
+          <p:cNvPr id="169" name="Google Shape;169;p10"/>
+          <p:cNvSpPr txBox="1"/>
+          <p:nvPr/>
+        </p:nvSpPr>
+        <p:spPr>
+          <a:xfrm>
+            <a:off x="868680" y="4251960"/>
+            <a:ext cx="10424160" cy="365760"/>
+          </a:xfrm>
+          <a:prstGeom prst="rect">
+            <a:avLst/>
+          </a:prstGeom>
+          <a:noFill/>
+          <a:ln>
+            <a:noFill/>
+          </a:ln>
+        </p:spPr>
+        <p:txBody>
+          <a:bodyPr anchorCtr="0" anchor="ctr" bIns="0" lIns="0" spcFirstLastPara="1" rIns="0" wrap="square" tIns="0">
+            <a:noAutofit/>
+          </a:bodyPr>
+          <a:lstStyle/>
+          <a:p>
+            <a:pPr indent="0" lvl="0" marL="0" marR="0" rtl="0" algn="l">
+              <a:spcBef>
+                <a:spcPts val="0"/>
+              </a:spcBef>
+              <a:spcAft>
+                <a:spcPts val="0"/>
+              </a:spcAft>
+              <a:buClr>
+                <a:srgbClr val="D9A441"/>
+              </a:buClr>
+              <a:buSzPts val="1600"/>
+              <a:buFont typeface="Tahoma"/>
+              <a:buNone/>
+            </a:pPr>
+            <a:r>
+              <a:rPr b="1" i="0" lang="en-US" sz="1600" u="none" cap="none" strike="noStrike">
+                <a:solidFill>
+                  <a:srgbClr val="D9A441"/>
+                </a:solidFill>
+                <a:latin typeface="Tahoma"/>
+                <a:ea typeface="Tahoma"/>
+                <a:cs typeface="Tahoma"/>
+                <a:sym typeface="Tahoma"/>
+              </a:rPr>
+              <a:t>สิ่งที่ผู้เล่นได้</a:t>
+            </a:r>
+            <a:endParaRPr b="0" i="0" sz="1600" u="none" cap="none" strike="noStrike">
+              <a:solidFill>
+                <a:schemeClr val="dk1"/>
+              </a:solidFill>
+              <a:latin typeface="Calibri"/>
+              <a:ea typeface="Calibri"/>
+              <a:cs typeface="Calibri"/>
+              <a:sym typeface="Calibri"/>
+            </a:endParaRPr>
+          </a:p>
+        </p:txBody>
+      </p:sp>
+      <p:sp>
+        <p:nvSpPr>
+          <p:cNvPr id="170" name="Google Shape;170;p10"/>
+          <p:cNvSpPr txBox="1"/>
+          <p:nvPr/>
+        </p:nvSpPr>
+        <p:spPr>
+          <a:xfrm>
+            <a:off x="868680" y="4663440"/>
+            <a:ext cx="10424160" cy="1463040"/>
+          </a:xfrm>
+          <a:prstGeom prst="rect">
+            <a:avLst/>
+          </a:prstGeom>
+          <a:noFill/>
+          <a:ln>
+            <a:noFill/>
+          </a:ln>
+        </p:spPr>
+        <p:txBody>
+          <a:bodyPr anchorCtr="0" anchor="t" bIns="0" lIns="0" spcFirstLastPara="1" rIns="0" wrap="square" tIns="0">
+            <a:noAutofit/>
+          </a:bodyPr>
+          <a:lstStyle/>
+          <a:p>
+            <a:pPr indent="-342900" lvl="0" marL="342900" marR="0" rtl="0" algn="l">
+              <a:spcBef>
+                <a:spcPts val="0"/>
+              </a:spcBef>
+              <a:spcAft>
+                <a:spcPts val="0"/>
+              </a:spcAft>
+              <a:buClr>
+                <a:srgbClr val="F4EFED"/>
+              </a:buClr>
+              <a:buSzPts val="1250"/>
+              <a:buFont typeface="Tahoma"/>
+              <a:buChar char="•"/>
+            </a:pPr>
+            <a:r>
+              <a:rPr b="0" i="0" lang="en-US" sz="1250" u="none" cap="none" strike="noStrike">
+                <a:solidFill>
+                  <a:srgbClr val="F4EFED"/>
+                </a:solidFill>
+                <a:latin typeface="Tahoma"/>
+                <a:ea typeface="Tahoma"/>
+                <a:cs typeface="Tahoma"/>
+                <a:sym typeface="Tahoma"/>
+              </a:rPr>
+              <a:t>ไมค์เปิดตลอด (ปิดเฉพาะตอนเปิดเมนู Esc) เสียงออกจากปากตัวละคร เบาลงตามระยะ และแยกซ้าย-ขวาได้</a:t>
+            </a:r>
+            <a:endParaRPr b="0" i="0" sz="1250" u="none" cap="none" strike="noStrike">
+              <a:solidFill>
+                <a:schemeClr val="dk1"/>
+              </a:solidFill>
+              <a:latin typeface="Calibri"/>
+              <a:ea typeface="Calibri"/>
+              <a:cs typeface="Calibri"/>
+              <a:sym typeface="Calibri"/>
+            </a:endParaRPr>
+          </a:p>
+          <a:p>
+            <a:pPr indent="-342900" lvl="0" marL="342900" marR="0" rtl="0" algn="l">
+              <a:spcBef>
+                <a:spcPts val="700"/>
+              </a:spcBef>
+              <a:spcAft>
+                <a:spcPts val="0"/>
+              </a:spcAft>
+              <a:buClr>
+                <a:srgbClr val="F4EFED"/>
+              </a:buClr>
+              <a:buSzPts val="1250"/>
+              <a:buFont typeface="Tahoma"/>
+              <a:buChar char="•"/>
+            </a:pPr>
+            <a:r>
+              <a:rPr b="0" i="0" lang="en-US" sz="1250" u="none" cap="none" strike="noStrike">
+                <a:solidFill>
+                  <a:srgbClr val="F4EFED"/>
+                </a:solidFill>
+                <a:latin typeface="Tahoma"/>
+                <a:ea typeface="Tahoma"/>
+                <a:cs typeface="Tahoma"/>
+                <a:sym typeface="Tahoma"/>
+              </a:rPr>
+              <a:t>วิทยุสื่อสาร: ถือในมือ เปิดเครื่อง แล้วกดเมาส์ซ้ายค้าง ทุกคนที่พกวิทยุที่เปิดอยู่ได้ยิน ไม่จำกัดระยะ</a:t>
+            </a:r>
+            <a:endParaRPr b="0" i="0" sz="1250" u="none" cap="none" strike="noStrike">
+              <a:solidFill>
+                <a:schemeClr val="dk1"/>
+              </a:solidFill>
+              <a:latin typeface="Calibri"/>
+              <a:ea typeface="Calibri"/>
+              <a:cs typeface="Calibri"/>
+              <a:sym typeface="Calibri"/>
+            </a:endParaRPr>
+          </a:p>
+          <a:p>
+            <a:pPr indent="-342900" lvl="0" marL="342900" marR="0" rtl="0" algn="l">
+              <a:spcBef>
+                <a:spcPts val="700"/>
+              </a:spcBef>
+              <a:spcAft>
+                <a:spcPts val="0"/>
+              </a:spcAft>
+              <a:buClr>
+                <a:srgbClr val="F4EFED"/>
+              </a:buClr>
+              <a:buSzPts val="1250"/>
+              <a:buFont typeface="Tahoma"/>
+              <a:buChar char="•"/>
+            </a:pPr>
+            <a:r>
+              <a:rPr b="0" i="0" lang="en-US" sz="1250" u="none" cap="none" strike="noStrike">
+                <a:solidFill>
+                  <a:srgbClr val="F4EFED"/>
+                </a:solidFill>
+                <a:latin typeface="Tahoma"/>
+                <a:ea typeface="Tahoma"/>
+                <a:cs typeface="Tahoma"/>
+                <a:sym typeface="Tahoma"/>
+              </a:rPr>
+              <a:t>Hotbar 4 ช่อง (ในมือ 1 + กระเป๋า 3) ข้อมูลคุมโดย Server</a:t>
+            </a:r>
+            <a:endParaRPr b="0" i="0" sz="1250" u="none" cap="none" strike="noStrike">
+              <a:solidFill>
+                <a:schemeClr val="dk1"/>
+              </a:solidFill>
+              <a:latin typeface="Calibri"/>
+              <a:ea typeface="Calibri"/>
+              <a:cs typeface="Calibri"/>
+              <a:sym typeface="Calibri"/>
+            </a:endParaRPr>
+          </a:p>
+          <a:p>
+            <a:pPr indent="-342900" lvl="0" marL="342900" marR="0" rtl="0" algn="l">
+              <a:spcBef>
+                <a:spcPts val="700"/>
+              </a:spcBef>
+              <a:spcAft>
+                <a:spcPts val="0"/>
+              </a:spcAft>
+              <a:buClr>
+                <a:srgbClr val="F4EFED"/>
+              </a:buClr>
+              <a:buSzPts val="1250"/>
+              <a:buFont typeface="Tahoma"/>
+              <a:buChar char="•"/>
+            </a:pPr>
+            <a:r>
+              <a:rPr b="0" i="0" lang="en-US" sz="1250" u="none" cap="none" strike="noStrike">
+                <a:solidFill>
+                  <a:srgbClr val="F4EFED"/>
+                </a:solidFill>
+                <a:latin typeface="Tahoma"/>
+                <a:ea typeface="Tahoma"/>
+                <a:cs typeface="Tahoma"/>
+                <a:sym typeface="Tahoma"/>
+              </a:rPr>
+              <a:t>ทดสอบจริง 3 เครื่องพร้อมกัน</a:t>
+            </a:r>
+            <a:endParaRPr b="0" i="0" sz="1250" u="none" cap="none" strike="noStrike">
+              <a:solidFill>
+                <a:schemeClr val="dk1"/>
+              </a:solidFill>
+              <a:latin typeface="Calibri"/>
+              <a:ea typeface="Calibri"/>
+              <a:cs typeface="Calibri"/>
+              <a:sym typeface="Calibri"/>
+            </a:endParaRPr>
+          </a:p>
+        </p:txBody>
+      </p:sp>
+      <p:sp>
+        <p:nvSpPr>
+          <p:cNvPr id="171" name="Google Shape;129;p8"/>
+          <p:cNvSpPr txBox="1"/>
+          <p:nvPr/>
+        </p:nvSpPr>
+        <p:spPr>
+          <a:xfrm>
+            <a:off x="548640" y="6327648"/>
+            <a:ext cx="11064240" cy="274320"/>
+          </a:xfrm>
+          <a:prstGeom prst="rect">
+            <a:avLst/>
+          </a:prstGeom>
+          <a:noFill/>
+          <a:ln>
+            <a:noFill/>
+          </a:ln>
+        </p:spPr>
+        <p:txBody>
+          <a:bodyPr anchorCtr="0" anchor="ctr" bIns="0" lIns="0" spcFirstLastPara="1" rIns="0" wrap="square" tIns="0">
+            <a:noAutofit/>
+          </a:bodyPr>
+          <a:lstStyle/>
+          <a:p>
+            <a:pPr indent="0" lvl="0" marL="0" marR="0" rtl="0" algn="l">
+              <a:spcBef>
+                <a:spcPts val="0"/>
+              </a:spcBef>
+              <a:spcAft>
+                <a:spcPts val="0"/>
+              </a:spcAft>
+              <a:buClr>
+                <a:srgbClr val="9A8F8B"/>
+              </a:buClr>
+              <a:buSzPts val="900"/>
+              <a:buFont typeface="Tahoma"/>
+              <a:buNone/>
+            </a:pPr>
+            <a:r>
+              <a:rPr b="0" i="0" lang="en-US" sz="900" u="none" cap="none" strike="noStrike">
+                <a:solidFill>
+                  <a:srgbClr val="9A8F8B"/>
+                </a:solidFill>
+                <a:latin typeface="Tahoma"/>
+                <a:ea typeface="Tahoma"/>
+                <a:cs typeface="Tahoma"/>
+                <a:sym typeface="Tahoma"/>
+              </a:rPr>
+              <a:t>2,725 บรรทัด · 16 ไฟล์ · Mirror + Unity Microphone</a:t>
+            </a:r>
+            <a:endParaRPr b="0" i="0" sz="900" u="none" cap="none" strike="noStrike">
               <a:solidFill>
                 <a:schemeClr val="dk1"/>
               </a:solidFill>
@@ -13025,7 +16140,7 @@
         <p:spPr>
           <a:xfrm>
             <a:off x="548640" y="1828800"/>
-            <a:ext cx="2423160" cy="1600200"/>
+            <a:ext cx="2423160" cy="1325880"/>
           </a:xfrm>
           <a:prstGeom prst="roundRect">
             <a:avLst>
@@ -13075,8 +16190,8 @@
         </p:nvSpPr>
         <p:spPr>
           <a:xfrm>
-            <a:off x="640080" y="1965960"/>
-            <a:ext cx="2240280" cy="822960"/>
+            <a:off x="640080" y="1901952"/>
+            <a:ext cx="2240280" cy="731520"/>
           </a:xfrm>
           <a:prstGeom prst="rect">
             <a:avLst/>
@@ -13116,7 +16231,7 @@
                 <a:cs typeface="Tahoma"/>
                 <a:sym typeface="Tahoma"/>
               </a:rPr>
-              <a:t>19</a:t>
+              <a:t>29</a:t>
             </a:r>
             <a:endParaRPr b="0" i="0" sz="3400" u="none" cap="none" strike="noStrike">
               <a:solidFill>
@@ -13138,8 +16253,8 @@
         </p:nvSpPr>
         <p:spPr>
           <a:xfrm>
-            <a:off x="640080" y="2743200"/>
-            <a:ext cx="2240280" cy="502920"/>
+            <a:off x="640080" y="2606040"/>
+            <a:ext cx="2240280" cy="411480"/>
           </a:xfrm>
           <a:prstGeom prst="rect">
             <a:avLst/>
@@ -13202,7 +16317,7 @@
         <p:spPr>
           <a:xfrm>
             <a:off x="3429000" y="1828800"/>
-            <a:ext cx="2423160" cy="1600200"/>
+            <a:ext cx="2423160" cy="1325880"/>
           </a:xfrm>
           <a:prstGeom prst="roundRect">
             <a:avLst>
@@ -13252,8 +16367,8 @@
         </p:nvSpPr>
         <p:spPr>
           <a:xfrm>
-            <a:off x="3520440" y="1965960"/>
-            <a:ext cx="2240280" cy="822960"/>
+            <a:off x="3520440" y="1901952"/>
+            <a:ext cx="2240280" cy="731520"/>
           </a:xfrm>
           <a:prstGeom prst="rect">
             <a:avLst/>
@@ -13293,7 +16408,7 @@
                 <a:cs typeface="Tahoma"/>
                 <a:sym typeface="Tahoma"/>
               </a:rPr>
-              <a:t>2,800+</a:t>
+              <a:t>9,000+</a:t>
             </a:r>
             <a:endParaRPr b="0" i="0" sz="3400" u="none" cap="none" strike="noStrike">
               <a:solidFill>
@@ -13315,8 +16430,8 @@
         </p:nvSpPr>
         <p:spPr>
           <a:xfrm>
-            <a:off x="3520440" y="2743200"/>
-            <a:ext cx="2240280" cy="502920"/>
+            <a:off x="3520440" y="2606040"/>
+            <a:ext cx="2240280" cy="411480"/>
           </a:xfrm>
           <a:prstGeom prst="rect">
             <a:avLst/>
@@ -13379,7 +16494,7 @@
         <p:spPr>
           <a:xfrm>
             <a:off x="6309360" y="1828800"/>
-            <a:ext cx="2423160" cy="1600200"/>
+            <a:ext cx="2423160" cy="1325880"/>
           </a:xfrm>
           <a:prstGeom prst="roundRect">
             <a:avLst>
@@ -13429,8 +16544,8 @@
         </p:nvSpPr>
         <p:spPr>
           <a:xfrm>
-            <a:off x="6400800" y="1965960"/>
-            <a:ext cx="2240280" cy="822960"/>
+            <a:off x="6400800" y="1901952"/>
+            <a:ext cx="2240280" cy="731520"/>
           </a:xfrm>
           <a:prstGeom prst="rect">
             <a:avLst/>
@@ -13492,8 +16607,8 @@
         </p:nvSpPr>
         <p:spPr>
           <a:xfrm>
-            <a:off x="6400800" y="2743200"/>
-            <a:ext cx="2240280" cy="502920"/>
+            <a:off x="6400800" y="2606040"/>
+            <a:ext cx="2240280" cy="411480"/>
           </a:xfrm>
           <a:prstGeom prst="rect">
             <a:avLst/>
@@ -13556,7 +16671,7 @@
         <p:spPr>
           <a:xfrm>
             <a:off x="9189720" y="1828800"/>
-            <a:ext cx="2423160" cy="1600200"/>
+            <a:ext cx="2423160" cy="1325880"/>
           </a:xfrm>
           <a:prstGeom prst="roundRect">
             <a:avLst>
@@ -13606,8 +16721,8 @@
         </p:nvSpPr>
         <p:spPr>
           <a:xfrm>
-            <a:off x="9281160" y="1965960"/>
-            <a:ext cx="2240280" cy="822960"/>
+            <a:off x="9281160" y="1901952"/>
+            <a:ext cx="2240280" cy="731520"/>
           </a:xfrm>
           <a:prstGeom prst="rect">
             <a:avLst/>
@@ -13647,7 +16762,7 @@
                 <a:cs typeface="Tahoma"/>
                 <a:sym typeface="Tahoma"/>
               </a:rPr>
-              <a:t>5</a:t>
+              <a:t>7</a:t>
             </a:r>
             <a:endParaRPr b="0" i="0" sz="3400" u="none" cap="none" strike="noStrike">
               <a:solidFill>
@@ -13669,8 +16784,8 @@
         </p:nvSpPr>
         <p:spPr>
           <a:xfrm>
-            <a:off x="9281160" y="2743200"/>
-            <a:ext cx="2240280" cy="502920"/>
+            <a:off x="9281160" y="2606040"/>
+            <a:ext cx="2240280" cy="411480"/>
           </a:xfrm>
           <a:prstGeom prst="rect">
             <a:avLst/>
@@ -13732,7 +16847,7 @@
         </p:nvSpPr>
         <p:spPr>
           <a:xfrm>
-            <a:off x="548640" y="3794760"/>
+            <a:off x="548640" y="3474720"/>
             <a:ext cx="384048" cy="384048"/>
           </a:xfrm>
           <a:prstGeom prst="ellipse">
@@ -13781,7 +16896,7 @@
         </p:nvSpPr>
         <p:spPr>
           <a:xfrm>
-            <a:off x="548640" y="3794760"/>
+            <a:off x="548640" y="3474720"/>
             <a:ext cx="384048" cy="384048"/>
           </a:xfrm>
           <a:prstGeom prst="rect">
@@ -13844,7 +16959,7 @@
         </p:nvSpPr>
         <p:spPr>
           <a:xfrm>
-            <a:off x="1097280" y="3794760"/>
+            <a:off x="1097280" y="3474720"/>
             <a:ext cx="10424160" cy="384048"/>
           </a:xfrm>
           <a:prstGeom prst="rect">
@@ -13907,7 +17022,7 @@
         </p:nvSpPr>
         <p:spPr>
           <a:xfrm>
-            <a:off x="548640" y="4297680"/>
+            <a:off x="548640" y="3904488"/>
             <a:ext cx="384048" cy="384048"/>
           </a:xfrm>
           <a:prstGeom prst="ellipse">
@@ -13956,7 +17071,7 @@
         </p:nvSpPr>
         <p:spPr>
           <a:xfrm>
-            <a:off x="548640" y="4297680"/>
+            <a:off x="548640" y="3904488"/>
             <a:ext cx="384048" cy="384048"/>
           </a:xfrm>
           <a:prstGeom prst="rect">
@@ -14019,7 +17134,7 @@
         </p:nvSpPr>
         <p:spPr>
           <a:xfrm>
-            <a:off x="1097280" y="4297680"/>
+            <a:off x="1097280" y="3904488"/>
             <a:ext cx="10424160" cy="384048"/>
           </a:xfrm>
           <a:prstGeom prst="rect">
@@ -14082,7 +17197,7 @@
         </p:nvSpPr>
         <p:spPr>
           <a:xfrm>
-            <a:off x="548640" y="4800600"/>
+            <a:off x="548640" y="4334256"/>
             <a:ext cx="384048" cy="384048"/>
           </a:xfrm>
           <a:prstGeom prst="ellipse">
@@ -14131,7 +17246,7 @@
         </p:nvSpPr>
         <p:spPr>
           <a:xfrm>
-            <a:off x="548640" y="4800600"/>
+            <a:off x="548640" y="4334256"/>
             <a:ext cx="384048" cy="384048"/>
           </a:xfrm>
           <a:prstGeom prst="rect">
@@ -14194,7 +17309,7 @@
         </p:nvSpPr>
         <p:spPr>
           <a:xfrm>
-            <a:off x="1097280" y="4800600"/>
+            <a:off x="1097280" y="4334256"/>
             <a:ext cx="10424160" cy="384048"/>
           </a:xfrm>
           <a:prstGeom prst="rect">
@@ -14257,7 +17372,7 @@
         </p:nvSpPr>
         <p:spPr>
           <a:xfrm>
-            <a:off x="548640" y="5303520"/>
+            <a:off x="548640" y="4764024"/>
             <a:ext cx="384048" cy="384048"/>
           </a:xfrm>
           <a:prstGeom prst="ellipse">
@@ -14306,7 +17421,7 @@
         </p:nvSpPr>
         <p:spPr>
           <a:xfrm>
-            <a:off x="548640" y="5303520"/>
+            <a:off x="548640" y="4764024"/>
             <a:ext cx="384048" cy="384048"/>
           </a:xfrm>
           <a:prstGeom prst="rect">
@@ -14369,7 +17484,7 @@
         </p:nvSpPr>
         <p:spPr>
           <a:xfrm>
-            <a:off x="1097280" y="5303520"/>
+            <a:off x="1097280" y="4764024"/>
             <a:ext cx="10424160" cy="384048"/>
           </a:xfrm>
           <a:prstGeom prst="rect">
@@ -14432,7 +17547,7 @@
         </p:nvSpPr>
         <p:spPr>
           <a:xfrm>
-            <a:off x="548640" y="5806440"/>
+            <a:off x="548640" y="5193792"/>
             <a:ext cx="384048" cy="384048"/>
           </a:xfrm>
           <a:prstGeom prst="ellipse">
@@ -14481,7 +17596,7 @@
         </p:nvSpPr>
         <p:spPr>
           <a:xfrm>
-            <a:off x="548640" y="5806440"/>
+            <a:off x="548640" y="5193792"/>
             <a:ext cx="384048" cy="384048"/>
           </a:xfrm>
           <a:prstGeom prst="rect">
@@ -14544,7 +17659,7 @@
         </p:nvSpPr>
         <p:spPr>
           <a:xfrm>
-            <a:off x="1097280" y="5806440"/>
+            <a:off x="1097280" y="5193792"/>
             <a:ext cx="10424160" cy="384048"/>
           </a:xfrm>
           <a:prstGeom prst="rect">
@@ -14586,6 +17701,356 @@
                 <a:sym typeface="Tahoma"/>
               </a:rPr>
               <a:t>ระบบ Match — เฟส นาฬิกา ทางออก ความยาก และกติกาจบเกม</a:t>
+            </a:r>
+            <a:endParaRPr b="0" i="0" sz="1350" u="none" cap="none" strike="noStrike">
+              <a:solidFill>
+                <a:schemeClr val="dk1"/>
+              </a:solidFill>
+              <a:latin typeface="Calibri"/>
+              <a:ea typeface="Calibri"/>
+              <a:cs typeface="Calibri"/>
+              <a:sym typeface="Calibri"/>
+            </a:endParaRPr>
+          </a:p>
+        </p:txBody>
+      </p:sp>
+      <p:sp>
+        <p:nvSpPr>
+          <p:cNvPr id="54" name="Google Shape;51;p4"/>
+          <p:cNvSpPr/>
+          <p:nvPr/>
+        </p:nvSpPr>
+        <p:spPr>
+          <a:xfrm>
+            <a:off x="548640" y="5623560"/>
+            <a:ext cx="384048" cy="384048"/>
+          </a:xfrm>
+          <a:prstGeom prst="ellipse">
+            <a:avLst/>
+          </a:prstGeom>
+          <a:solidFill>
+            <a:srgbClr val="D9A441"/>
+          </a:solidFill>
+          <a:ln cap="flat" cmpd="sng" w="12700">
+            <a:solidFill>
+              <a:srgbClr val="D9A441"/>
+            </a:solidFill>
+            <a:prstDash val="solid"/>
+            <a:round/>
+            <a:headEnd len="sm" w="sm" type="none"/>
+            <a:tailEnd len="sm" w="sm" type="none"/>
+          </a:ln>
+        </p:spPr>
+        <p:txBody>
+          <a:bodyPr anchorCtr="0" anchor="ctr" bIns="91425" lIns="91425" spcFirstLastPara="1" rIns="91425" wrap="square" tIns="91425">
+            <a:noAutofit/>
+          </a:bodyPr>
+          <a:lstStyle/>
+          <a:p>
+            <a:pPr indent="0" lvl="0" marL="0" rtl="0" algn="l">
+              <a:spcBef>
+                <a:spcPts val="0"/>
+              </a:spcBef>
+              <a:spcAft>
+                <a:spcPts val="0"/>
+              </a:spcAft>
+              <a:buNone/>
+            </a:pPr>
+            <a:r>
+              <a:t/>
+            </a:r>
+            <a:endParaRPr/>
+          </a:p>
+        </p:txBody>
+      </p:sp>
+      <p:sp>
+        <p:nvSpPr>
+          <p:cNvPr id="55" name="Google Shape;52;p4"/>
+          <p:cNvSpPr txBox="1"/>
+          <p:nvPr/>
+        </p:nvSpPr>
+        <p:spPr>
+          <a:xfrm>
+            <a:off x="548640" y="5623560"/>
+            <a:ext cx="384048" cy="384048"/>
+          </a:xfrm>
+          <a:prstGeom prst="rect">
+            <a:avLst/>
+          </a:prstGeom>
+          <a:noFill/>
+          <a:ln>
+            <a:noFill/>
+          </a:ln>
+        </p:spPr>
+        <p:txBody>
+          <a:bodyPr anchorCtr="0" anchor="ctr" bIns="0" lIns="0" spcFirstLastPara="1" rIns="0" wrap="square" tIns="0">
+            <a:noAutofit/>
+          </a:bodyPr>
+          <a:lstStyle/>
+          <a:p>
+            <a:pPr indent="0" lvl="0" marL="0" marR="0" rtl="0" algn="ctr">
+              <a:spcBef>
+                <a:spcPts val="0"/>
+              </a:spcBef>
+              <a:spcAft>
+                <a:spcPts val="0"/>
+              </a:spcAft>
+              <a:buClr>
+                <a:srgbClr val="15110F"/>
+              </a:buClr>
+              <a:buSzPts val="1400"/>
+              <a:buFont typeface="Tahoma"/>
+              <a:buNone/>
+            </a:pPr>
+            <a:r>
+              <a:rPr b="1" i="0" lang="en-US" sz="1400" u="none" cap="none" strike="noStrike">
+                <a:solidFill>
+                  <a:srgbClr val="15110F"/>
+                </a:solidFill>
+                <a:latin typeface="Tahoma"/>
+                <a:ea typeface="Tahoma"/>
+                <a:cs typeface="Tahoma"/>
+                <a:sym typeface="Tahoma"/>
+              </a:rPr>
+              <a:t>6</a:t>
+            </a:r>
+            <a:endParaRPr b="0" i="0" sz="1400" u="none" cap="none" strike="noStrike">
+              <a:solidFill>
+                <a:schemeClr val="dk1"/>
+              </a:solidFill>
+              <a:latin typeface="Calibri"/>
+              <a:ea typeface="Calibri"/>
+              <a:cs typeface="Calibri"/>
+              <a:sym typeface="Calibri"/>
+            </a:endParaRPr>
+          </a:p>
+        </p:txBody>
+      </p:sp>
+      <p:sp>
+        <p:nvSpPr>
+          <p:cNvPr id="56" name="Google Shape;53;p4"/>
+          <p:cNvSpPr txBox="1"/>
+          <p:nvPr/>
+        </p:nvSpPr>
+        <p:spPr>
+          <a:xfrm>
+            <a:off x="1097280" y="5623560"/>
+            <a:ext cx="10424160" cy="384048"/>
+          </a:xfrm>
+          <a:prstGeom prst="rect">
+            <a:avLst/>
+          </a:prstGeom>
+          <a:noFill/>
+          <a:ln>
+            <a:noFill/>
+          </a:ln>
+        </p:spPr>
+        <p:txBody>
+          <a:bodyPr anchorCtr="0" anchor="ctr" bIns="0" lIns="0" spcFirstLastPara="1" rIns="0" wrap="square" tIns="0">
+            <a:noAutofit/>
+          </a:bodyPr>
+          <a:lstStyle/>
+          <a:p>
+            <a:pPr indent="0" lvl="0" marL="0" marR="0" rtl="0" algn="l">
+              <a:spcBef>
+                <a:spcPts val="0"/>
+              </a:spcBef>
+              <a:spcAft>
+                <a:spcPts val="0"/>
+              </a:spcAft>
+              <a:buClr>
+                <a:srgbClr val="F4EFED"/>
+              </a:buClr>
+              <a:buSzPts val="1350"/>
+              <a:buFont typeface="Tahoma"/>
+              <a:buNone/>
+            </a:pPr>
+            <a:r>
+              <a:rPr b="0" i="0" lang="en-US" sz="1350" u="none" cap="none" strike="noStrike">
+                <a:solidFill>
+                  <a:srgbClr val="F4EFED"/>
+                </a:solidFill>
+                <a:latin typeface="Tahoma"/>
+                <a:ea typeface="Tahoma"/>
+                <a:cs typeface="Tahoma"/>
+                <a:sym typeface="Tahoma"/>
+              </a:rPr>
+              <a:t>เมนูหลัก ห้องรอ และการตั้งค่า — สร้างห้อง หาห้อง เข้าห้องด่วน Ready / Start และเมนู Esc</a:t>
+            </a:r>
+            <a:endParaRPr b="0" i="0" sz="1350" u="none" cap="none" strike="noStrike">
+              <a:solidFill>
+                <a:schemeClr val="dk1"/>
+              </a:solidFill>
+              <a:latin typeface="Calibri"/>
+              <a:ea typeface="Calibri"/>
+              <a:cs typeface="Calibri"/>
+              <a:sym typeface="Calibri"/>
+            </a:endParaRPr>
+          </a:p>
+        </p:txBody>
+      </p:sp>
+      <p:sp>
+        <p:nvSpPr>
+          <p:cNvPr id="57" name="Google Shape;51;p4"/>
+          <p:cNvSpPr/>
+          <p:nvPr/>
+        </p:nvSpPr>
+        <p:spPr>
+          <a:xfrm>
+            <a:off x="548640" y="6053328"/>
+            <a:ext cx="384048" cy="384048"/>
+          </a:xfrm>
+          <a:prstGeom prst="ellipse">
+            <a:avLst/>
+          </a:prstGeom>
+          <a:solidFill>
+            <a:srgbClr val="D9A441"/>
+          </a:solidFill>
+          <a:ln cap="flat" cmpd="sng" w="12700">
+            <a:solidFill>
+              <a:srgbClr val="D9A441"/>
+            </a:solidFill>
+            <a:prstDash val="solid"/>
+            <a:round/>
+            <a:headEnd len="sm" w="sm" type="none"/>
+            <a:tailEnd len="sm" w="sm" type="none"/>
+          </a:ln>
+        </p:spPr>
+        <p:txBody>
+          <a:bodyPr anchorCtr="0" anchor="ctr" bIns="91425" lIns="91425" spcFirstLastPara="1" rIns="91425" wrap="square" tIns="91425">
+            <a:noAutofit/>
+          </a:bodyPr>
+          <a:lstStyle/>
+          <a:p>
+            <a:pPr indent="0" lvl="0" marL="0" rtl="0" algn="l">
+              <a:spcBef>
+                <a:spcPts val="0"/>
+              </a:spcBef>
+              <a:spcAft>
+                <a:spcPts val="0"/>
+              </a:spcAft>
+              <a:buNone/>
+            </a:pPr>
+            <a:r>
+              <a:t/>
+            </a:r>
+            <a:endParaRPr/>
+          </a:p>
+        </p:txBody>
+      </p:sp>
+      <p:sp>
+        <p:nvSpPr>
+          <p:cNvPr id="58" name="Google Shape;52;p4"/>
+          <p:cNvSpPr txBox="1"/>
+          <p:nvPr/>
+        </p:nvSpPr>
+        <p:spPr>
+          <a:xfrm>
+            <a:off x="548640" y="6053328"/>
+            <a:ext cx="384048" cy="384048"/>
+          </a:xfrm>
+          <a:prstGeom prst="rect">
+            <a:avLst/>
+          </a:prstGeom>
+          <a:noFill/>
+          <a:ln>
+            <a:noFill/>
+          </a:ln>
+        </p:spPr>
+        <p:txBody>
+          <a:bodyPr anchorCtr="0" anchor="ctr" bIns="0" lIns="0" spcFirstLastPara="1" rIns="0" wrap="square" tIns="0">
+            <a:noAutofit/>
+          </a:bodyPr>
+          <a:lstStyle/>
+          <a:p>
+            <a:pPr indent="0" lvl="0" marL="0" marR="0" rtl="0" algn="ctr">
+              <a:spcBef>
+                <a:spcPts val="0"/>
+              </a:spcBef>
+              <a:spcAft>
+                <a:spcPts val="0"/>
+              </a:spcAft>
+              <a:buClr>
+                <a:srgbClr val="15110F"/>
+              </a:buClr>
+              <a:buSzPts val="1400"/>
+              <a:buFont typeface="Tahoma"/>
+              <a:buNone/>
+            </a:pPr>
+            <a:r>
+              <a:rPr b="1" i="0" lang="en-US" sz="1400" u="none" cap="none" strike="noStrike">
+                <a:solidFill>
+                  <a:srgbClr val="15110F"/>
+                </a:solidFill>
+                <a:latin typeface="Tahoma"/>
+                <a:ea typeface="Tahoma"/>
+                <a:cs typeface="Tahoma"/>
+                <a:sym typeface="Tahoma"/>
+              </a:rPr>
+              <a:t>7</a:t>
+            </a:r>
+            <a:endParaRPr b="0" i="0" sz="1400" u="none" cap="none" strike="noStrike">
+              <a:solidFill>
+                <a:schemeClr val="dk1"/>
+              </a:solidFill>
+              <a:latin typeface="Calibri"/>
+              <a:ea typeface="Calibri"/>
+              <a:cs typeface="Calibri"/>
+              <a:sym typeface="Calibri"/>
+            </a:endParaRPr>
+          </a:p>
+        </p:txBody>
+      </p:sp>
+      <p:sp>
+        <p:nvSpPr>
+          <p:cNvPr id="59" name="Google Shape;53;p4"/>
+          <p:cNvSpPr txBox="1"/>
+          <p:nvPr/>
+        </p:nvSpPr>
+        <p:spPr>
+          <a:xfrm>
+            <a:off x="1097280" y="6053328"/>
+            <a:ext cx="10424160" cy="384048"/>
+          </a:xfrm>
+          <a:prstGeom prst="rect">
+            <a:avLst/>
+          </a:prstGeom>
+          <a:noFill/>
+          <a:ln>
+            <a:noFill/>
+          </a:ln>
+        </p:spPr>
+        <p:txBody>
+          <a:bodyPr anchorCtr="0" anchor="ctr" bIns="0" lIns="0" spcFirstLastPara="1" rIns="0" wrap="square" tIns="0">
+            <a:noAutofit/>
+          </a:bodyPr>
+          <a:lstStyle/>
+          <a:p>
+            <a:pPr indent="0" lvl="0" marL="0" marR="0" rtl="0" algn="l">
+              <a:spcBef>
+                <a:spcPts val="0"/>
+              </a:spcBef>
+              <a:spcAft>
+                <a:spcPts val="0"/>
+              </a:spcAft>
+              <a:buClr>
+                <a:srgbClr val="F4EFED"/>
+              </a:buClr>
+              <a:buSzPts val="1350"/>
+              <a:buFont typeface="Tahoma"/>
+              <a:buNone/>
+            </a:pPr>
+            <a:r>
+              <a:rPr b="0" i="0" lang="en-US" sz="1350" u="none" cap="none" strike="noStrike">
+                <a:solidFill>
+                  <a:srgbClr val="F4EFED"/>
+                </a:solidFill>
+                <a:latin typeface="Tahoma"/>
+                <a:ea typeface="Tahoma"/>
+                <a:cs typeface="Tahoma"/>
+                <a:sym typeface="Tahoma"/>
+              </a:rPr>
+              <a:t>เสียงพูด 3D และวิทยุสื่อสาร — ได้ยินตามระยะจริง และคุยผ่านวิทยุได้ไม่จำกัดระยะ</a:t>
             </a:r>
             <a:endParaRPr b="0" i="0" sz="1350" u="none" cap="none" strike="noStrike">
               <a:solidFill>
@@ -15228,6 +18693,80 @@
               <a:sym typeface="Calibri"/>
             </a:endParaRPr>
           </a:p>
+          <a:p>
+            <a:pPr indent="-342900" lvl="0" marL="342900" marR="0" rtl="0" algn="l">
+              <a:spcBef>
+                <a:spcPts val="700"/>
+              </a:spcBef>
+              <a:spcAft>
+                <a:spcPts val="0"/>
+              </a:spcAft>
+              <a:buClr>
+                <a:srgbClr val="F4EFED"/>
+              </a:buClr>
+              <a:buSzPts val="1100"/>
+              <a:buFont typeface="Tahoma"/>
+              <a:buChar char="•"/>
+            </a:pPr>
+            <a:r>
+              <a:rPr b="0" i="0" lang="en-US" sz="1100" u="none" cap="none" strike="noStrike">
+                <a:solidFill>
+                  <a:srgbClr val="F4EFED"/>
+                </a:solidFill>
+                <a:latin typeface="Tahoma"/>
+                <a:ea typeface="Tahoma"/>
+                <a:cs typeface="Tahoma"/>
+                <a:sym typeface="Tahoma"/>
+              </a:rPr>
+              <a:t>เมนูหลัก ห้องรอ และการตั้งค่า</a:t>
+            </a:r>
+            <a:endParaRPr b="0" i="0" sz="1100" u="none" cap="none" strike="noStrike">
+              <a:solidFill>
+                <a:schemeClr val="dk1"/>
+              </a:solidFill>
+              <a:latin typeface="Calibri"/>
+              <a:ea typeface="Calibri"/>
+              <a:cs typeface="Calibri"/>
+              <a:sym typeface="Calibri"/>
+            </a:endParaRPr>
+          </a:p>
+          <a:p>
+            <a:pPr indent="-342900" lvl="0" marL="342900" marR="0" rtl="0" algn="l">
+              <a:spcBef>
+                <a:spcPts val="700"/>
+              </a:spcBef>
+              <a:spcAft>
+                <a:spcPts val="0"/>
+              </a:spcAft>
+              <a:buClr>
+                <a:srgbClr val="F4EFED"/>
+              </a:buClr>
+              <a:buSzPts val="1100"/>
+              <a:buFont typeface="Tahoma"/>
+              <a:buChar char="•"/>
+            </a:pPr>
+            <a:r>
+              <a:rPr b="0" i="0" lang="en-US" sz="1100" u="none" cap="none" strike="noStrike">
+                <a:solidFill>
+                  <a:srgbClr val="F4EFED"/>
+                </a:solidFill>
+                <a:latin typeface="Tahoma"/>
+                <a:ea typeface="Tahoma"/>
+                <a:cs typeface="Tahoma"/>
+                <a:sym typeface="Tahoma"/>
+              </a:rPr>
+              <a:t>วิทยุสื่อสารและ Hotbar</a:t>
+            </a:r>
+            <a:endParaRPr b="0" i="0" sz="1100" u="none" cap="none" strike="noStrike">
+              <a:solidFill>
+                <a:schemeClr val="dk1"/>
+              </a:solidFill>
+              <a:latin typeface="Calibri"/>
+              <a:ea typeface="Calibri"/>
+              <a:cs typeface="Calibri"/>
+              <a:sym typeface="Calibri"/>
+            </a:endParaRPr>
+          </a:p>
         </p:txBody>
       </p:sp>
       <p:sp>
@@ -16024,7 +19563,7 @@
                 <a:cs typeface="Tahoma"/>
                 <a:sym typeface="Tahoma"/>
               </a:rPr>
-              <a:t>ลำดับงานสี่สัปดาห์</a:t>
+              <a:t>ลำดับงานห้าสัปดาห์</a:t>
             </a:r>
             <a:endParaRPr b="0" i="0" sz="3200" u="none" cap="none" strike="noStrike">
               <a:solidFill>
@@ -16109,8 +19648,8 @@
         </p:nvSpPr>
         <p:spPr>
           <a:xfrm>
-            <a:off x="457200" y="1920240"/>
-            <a:ext cx="11155680" cy="914400"/>
+            <a:off x="457200" y="1783080"/>
+            <a:ext cx="11155680" cy="822960"/>
           </a:xfrm>
           <a:prstGeom prst="roundRect">
             <a:avLst>
@@ -16160,7 +19699,7 @@
         </p:nvSpPr>
         <p:spPr>
           <a:xfrm>
-            <a:off x="731520" y="2185416"/>
+            <a:off x="731520" y="2002536"/>
             <a:ext cx="384048" cy="384048"/>
           </a:xfrm>
           <a:prstGeom prst="ellipse">
@@ -16209,7 +19748,7 @@
         </p:nvSpPr>
         <p:spPr>
           <a:xfrm>
-            <a:off x="731520" y="2185416"/>
+            <a:off x="731520" y="2002536"/>
             <a:ext cx="384048" cy="384048"/>
           </a:xfrm>
           <a:prstGeom prst="rect">
@@ -16272,7 +19811,7 @@
         </p:nvSpPr>
         <p:spPr>
           <a:xfrm>
-            <a:off x="1325880" y="2029968"/>
+            <a:off x="1325880" y="1847088"/>
             <a:ext cx="2011680" cy="365760"/>
           </a:xfrm>
           <a:prstGeom prst="rect">
@@ -16335,7 +19874,7 @@
         </p:nvSpPr>
         <p:spPr>
           <a:xfrm>
-            <a:off x="1325880" y="2377440"/>
+            <a:off x="1325880" y="2194560"/>
             <a:ext cx="2011680" cy="320040"/>
           </a:xfrm>
           <a:prstGeom prst="rect">
@@ -16398,7 +19937,7 @@
         </p:nvSpPr>
         <p:spPr>
           <a:xfrm>
-            <a:off x="3474720" y="2057400"/>
+            <a:off x="3474720" y="1874520"/>
             <a:ext cx="7863840" cy="640080"/>
           </a:xfrm>
           <a:prstGeom prst="rect">
@@ -16461,8 +20000,8 @@
         </p:nvSpPr>
         <p:spPr>
           <a:xfrm>
-            <a:off x="457200" y="2971800"/>
-            <a:ext cx="11155680" cy="914400"/>
+            <a:off x="457200" y="2715768"/>
+            <a:ext cx="11155680" cy="822960"/>
           </a:xfrm>
           <a:prstGeom prst="roundRect">
             <a:avLst>
@@ -16512,7 +20051,7 @@
         </p:nvSpPr>
         <p:spPr>
           <a:xfrm>
-            <a:off x="731520" y="3236976"/>
+            <a:off x="731520" y="2935224"/>
             <a:ext cx="384048" cy="384048"/>
           </a:xfrm>
           <a:prstGeom prst="ellipse">
@@ -16561,7 +20100,7 @@
         </p:nvSpPr>
         <p:spPr>
           <a:xfrm>
-            <a:off x="731520" y="3236976"/>
+            <a:off x="731520" y="2935224"/>
             <a:ext cx="384048" cy="384048"/>
           </a:xfrm>
           <a:prstGeom prst="rect">
@@ -16624,7 +20163,7 @@
         </p:nvSpPr>
         <p:spPr>
           <a:xfrm>
-            <a:off x="1325880" y="3081528"/>
+            <a:off x="1325880" y="2779776"/>
             <a:ext cx="2011680" cy="365760"/>
           </a:xfrm>
           <a:prstGeom prst="rect">
@@ -16687,7 +20226,7 @@
         </p:nvSpPr>
         <p:spPr>
           <a:xfrm>
-            <a:off x="1325880" y="3429000"/>
+            <a:off x="1325880" y="3127248"/>
             <a:ext cx="2011680" cy="320040"/>
           </a:xfrm>
           <a:prstGeom prst="rect">
@@ -16750,7 +20289,7 @@
         </p:nvSpPr>
         <p:spPr>
           <a:xfrm>
-            <a:off x="3474720" y="3108960"/>
+            <a:off x="3474720" y="2807208"/>
             <a:ext cx="7863840" cy="640080"/>
           </a:xfrm>
           <a:prstGeom prst="rect">
@@ -16813,8 +20352,8 @@
         </p:nvSpPr>
         <p:spPr>
           <a:xfrm>
-            <a:off x="457200" y="4023360"/>
-            <a:ext cx="11155680" cy="914400"/>
+            <a:off x="457200" y="3648456"/>
+            <a:ext cx="11155680" cy="822960"/>
           </a:xfrm>
           <a:prstGeom prst="roundRect">
             <a:avLst>
@@ -16864,7 +20403,7 @@
         </p:nvSpPr>
         <p:spPr>
           <a:xfrm>
-            <a:off x="731520" y="4288536"/>
+            <a:off x="731520" y="3867912"/>
             <a:ext cx="384048" cy="384048"/>
           </a:xfrm>
           <a:prstGeom prst="ellipse">
@@ -16913,7 +20452,7 @@
         </p:nvSpPr>
         <p:spPr>
           <a:xfrm>
-            <a:off x="731520" y="4288536"/>
+            <a:off x="731520" y="3867912"/>
             <a:ext cx="384048" cy="384048"/>
           </a:xfrm>
           <a:prstGeom prst="rect">
@@ -16976,7 +20515,7 @@
         </p:nvSpPr>
         <p:spPr>
           <a:xfrm>
-            <a:off x="1325880" y="4133088"/>
+            <a:off x="1325880" y="3712464"/>
             <a:ext cx="2011680" cy="365760"/>
           </a:xfrm>
           <a:prstGeom prst="rect">
@@ -17039,7 +20578,7 @@
         </p:nvSpPr>
         <p:spPr>
           <a:xfrm>
-            <a:off x="1325880" y="4480560"/>
+            <a:off x="1325880" y="4059936"/>
             <a:ext cx="2011680" cy="320040"/>
           </a:xfrm>
           <a:prstGeom prst="rect">
@@ -17102,7 +20641,7 @@
         </p:nvSpPr>
         <p:spPr>
           <a:xfrm>
-            <a:off x="3474720" y="4160520"/>
+            <a:off x="3474720" y="3739896"/>
             <a:ext cx="7863840" cy="640080"/>
           </a:xfrm>
           <a:prstGeom prst="rect">
@@ -17165,8 +20704,8 @@
         </p:nvSpPr>
         <p:spPr>
           <a:xfrm>
-            <a:off x="457200" y="5074920"/>
-            <a:ext cx="11155680" cy="914400"/>
+            <a:off x="457200" y="4581144"/>
+            <a:ext cx="11155680" cy="822960"/>
           </a:xfrm>
           <a:prstGeom prst="roundRect">
             <a:avLst>
@@ -17216,7 +20755,7 @@
         </p:nvSpPr>
         <p:spPr>
           <a:xfrm>
-            <a:off x="731520" y="5340096"/>
+            <a:off x="731520" y="4800600"/>
             <a:ext cx="384048" cy="384048"/>
           </a:xfrm>
           <a:prstGeom prst="ellipse">
@@ -17265,7 +20804,7 @@
         </p:nvSpPr>
         <p:spPr>
           <a:xfrm>
-            <a:off x="731520" y="5340096"/>
+            <a:off x="731520" y="4800600"/>
             <a:ext cx="384048" cy="384048"/>
           </a:xfrm>
           <a:prstGeom prst="rect">
@@ -17328,7 +20867,7 @@
         </p:nvSpPr>
         <p:spPr>
           <a:xfrm>
-            <a:off x="1325880" y="5184648"/>
+            <a:off x="1325880" y="4645152"/>
             <a:ext cx="2011680" cy="365760"/>
           </a:xfrm>
           <a:prstGeom prst="rect">
@@ -17391,7 +20930,7 @@
         </p:nvSpPr>
         <p:spPr>
           <a:xfrm>
-            <a:off x="1325880" y="5532120"/>
+            <a:off x="1325880" y="4992624"/>
             <a:ext cx="2011680" cy="320040"/>
           </a:xfrm>
           <a:prstGeom prst="rect">
@@ -17454,7 +20993,7 @@
         </p:nvSpPr>
         <p:spPr>
           <a:xfrm>
-            <a:off x="3474720" y="5212080"/>
+            <a:off x="3474720" y="4672584"/>
             <a:ext cx="7863840" cy="640080"/>
           </a:xfrm>
           <a:prstGeom prst="rect">
@@ -17496,6 +21035,358 @@
                 <a:sym typeface="Tahoma"/>
               </a:rPr>
               <a:t>ระบบ Match ความยาก 4 ระดับ กติกาจบเกม และแปลงผี+มินิเกมเป็นหลายคน</a:t>
+            </a:r>
+            <a:endParaRPr b="0" i="0" sz="1250" u="none" cap="none" strike="noStrike">
+              <a:solidFill>
+                <a:schemeClr val="dk1"/>
+              </a:solidFill>
+              <a:latin typeface="Calibri"/>
+              <a:ea typeface="Calibri"/>
+              <a:cs typeface="Calibri"/>
+              <a:sym typeface="Calibri"/>
+            </a:endParaRPr>
+          </a:p>
+        </p:txBody>
+      </p:sp>
+      <p:sp>
+        <p:nvSpPr>
+          <p:cNvPr id="102" name="Google Shape;96;p6"/>
+          <p:cNvSpPr/>
+          <p:nvPr/>
+        </p:nvSpPr>
+        <p:spPr>
+          <a:xfrm>
+            <a:off x="457200" y="5513832"/>
+            <a:ext cx="11155680" cy="822960"/>
+          </a:xfrm>
+          <a:prstGeom prst="roundRect">
+            <a:avLst>
+              <a:gd fmla="val 8000" name="adj"/>
+            </a:avLst>
+          </a:prstGeom>
+          <a:solidFill>
+            <a:srgbClr val="241C1A"/>
+          </a:solidFill>
+          <a:ln cap="flat" cmpd="sng" w="12700">
+            <a:solidFill>
+              <a:srgbClr val="3A2F2C"/>
+            </a:solidFill>
+            <a:prstDash val="solid"/>
+            <a:round/>
+            <a:headEnd len="sm" w="sm" type="none"/>
+            <a:tailEnd len="sm" w="sm" type="none"/>
+          </a:ln>
+        </p:spPr>
+        <p:txBody>
+          <a:bodyPr anchorCtr="0" anchor="ctr" bIns="91425" lIns="91425" spcFirstLastPara="1" rIns="91425" wrap="square" tIns="91425">
+            <a:noAutofit/>
+          </a:bodyPr>
+          <a:lstStyle/>
+          <a:p>
+            <a:pPr indent="0" lvl="0" marL="0" rtl="0" algn="l">
+              <a:spcBef>
+                <a:spcPts val="0"/>
+              </a:spcBef>
+              <a:spcAft>
+                <a:spcPts val="0"/>
+              </a:spcAft>
+              <a:buNone/>
+            </a:pPr>
+            <a:r>
+              <a:t/>
+            </a:r>
+            <a:endParaRPr/>
+          </a:p>
+        </p:txBody>
+      </p:sp>
+      <p:sp>
+        <p:nvSpPr>
+          <p:cNvPr id="103" name="Google Shape;97;p6"/>
+          <p:cNvSpPr/>
+          <p:nvPr/>
+        </p:nvSpPr>
+        <p:spPr>
+          <a:xfrm>
+            <a:off x="731520" y="5733288"/>
+            <a:ext cx="384048" cy="384048"/>
+          </a:xfrm>
+          <a:prstGeom prst="ellipse">
+            <a:avLst/>
+          </a:prstGeom>
+          <a:solidFill>
+            <a:srgbClr val="D9A441"/>
+          </a:solidFill>
+          <a:ln cap="flat" cmpd="sng" w="12700">
+            <a:solidFill>
+              <a:srgbClr val="D9A441"/>
+            </a:solidFill>
+            <a:prstDash val="solid"/>
+            <a:round/>
+            <a:headEnd len="sm" w="sm" type="none"/>
+            <a:tailEnd len="sm" w="sm" type="none"/>
+          </a:ln>
+        </p:spPr>
+        <p:txBody>
+          <a:bodyPr anchorCtr="0" anchor="ctr" bIns="91425" lIns="91425" spcFirstLastPara="1" rIns="91425" wrap="square" tIns="91425">
+            <a:noAutofit/>
+          </a:bodyPr>
+          <a:lstStyle/>
+          <a:p>
+            <a:pPr indent="0" lvl="0" marL="0" rtl="0" algn="l">
+              <a:spcBef>
+                <a:spcPts val="0"/>
+              </a:spcBef>
+              <a:spcAft>
+                <a:spcPts val="0"/>
+              </a:spcAft>
+              <a:buNone/>
+            </a:pPr>
+            <a:r>
+              <a:t/>
+            </a:r>
+            <a:endParaRPr/>
+          </a:p>
+        </p:txBody>
+      </p:sp>
+      <p:sp>
+        <p:nvSpPr>
+          <p:cNvPr id="104" name="Google Shape;98;p6"/>
+          <p:cNvSpPr txBox="1"/>
+          <p:nvPr/>
+        </p:nvSpPr>
+        <p:spPr>
+          <a:xfrm>
+            <a:off x="731520" y="5733288"/>
+            <a:ext cx="384048" cy="384048"/>
+          </a:xfrm>
+          <a:prstGeom prst="rect">
+            <a:avLst/>
+          </a:prstGeom>
+          <a:noFill/>
+          <a:ln>
+            <a:noFill/>
+          </a:ln>
+        </p:spPr>
+        <p:txBody>
+          <a:bodyPr anchorCtr="0" anchor="ctr" bIns="0" lIns="0" spcFirstLastPara="1" rIns="0" wrap="square" tIns="0">
+            <a:noAutofit/>
+          </a:bodyPr>
+          <a:lstStyle/>
+          <a:p>
+            <a:pPr indent="0" lvl="0" marL="0" marR="0" rtl="0" algn="ctr">
+              <a:spcBef>
+                <a:spcPts val="0"/>
+              </a:spcBef>
+              <a:spcAft>
+                <a:spcPts val="0"/>
+              </a:spcAft>
+              <a:buClr>
+                <a:srgbClr val="15110F"/>
+              </a:buClr>
+              <a:buSzPts val="1400"/>
+              <a:buFont typeface="Tahoma"/>
+              <a:buNone/>
+            </a:pPr>
+            <a:r>
+              <a:rPr b="1" i="0" lang="en-US" sz="1400" u="none" cap="none" strike="noStrike">
+                <a:solidFill>
+                  <a:srgbClr val="15110F"/>
+                </a:solidFill>
+                <a:latin typeface="Tahoma"/>
+                <a:ea typeface="Tahoma"/>
+                <a:cs typeface="Tahoma"/>
+                <a:sym typeface="Tahoma"/>
+              </a:rPr>
+              <a:t>5</a:t>
+            </a:r>
+            <a:endParaRPr b="0" i="0" sz="1400" u="none" cap="none" strike="noStrike">
+              <a:solidFill>
+                <a:schemeClr val="dk1"/>
+              </a:solidFill>
+              <a:latin typeface="Calibri"/>
+              <a:ea typeface="Calibri"/>
+              <a:cs typeface="Calibri"/>
+              <a:sym typeface="Calibri"/>
+            </a:endParaRPr>
+          </a:p>
+        </p:txBody>
+      </p:sp>
+      <p:sp>
+        <p:nvSpPr>
+          <p:cNvPr id="105" name="Google Shape;99;p6"/>
+          <p:cNvSpPr txBox="1"/>
+          <p:nvPr/>
+        </p:nvSpPr>
+        <p:spPr>
+          <a:xfrm>
+            <a:off x="1325880" y="5577840"/>
+            <a:ext cx="2011680" cy="365760"/>
+          </a:xfrm>
+          <a:prstGeom prst="rect">
+            <a:avLst/>
+          </a:prstGeom>
+          <a:noFill/>
+          <a:ln>
+            <a:noFill/>
+          </a:ln>
+        </p:spPr>
+        <p:txBody>
+          <a:bodyPr anchorCtr="0" anchor="ctr" bIns="0" lIns="0" spcFirstLastPara="1" rIns="0" wrap="square" tIns="0">
+            <a:noAutofit/>
+          </a:bodyPr>
+          <a:lstStyle/>
+          <a:p>
+            <a:pPr indent="0" lvl="0" marL="0" marR="0" rtl="0" algn="l">
+              <a:spcBef>
+                <a:spcPts val="0"/>
+              </a:spcBef>
+              <a:spcAft>
+                <a:spcPts val="0"/>
+              </a:spcAft>
+              <a:buClr>
+                <a:srgbClr val="F4EFED"/>
+              </a:buClr>
+              <a:buSzPts val="1400"/>
+              <a:buFont typeface="Tahoma"/>
+              <a:buNone/>
+            </a:pPr>
+            <a:r>
+              <a:rPr b="1" i="0" lang="en-US" sz="1400" u="none" cap="none" strike="noStrike">
+                <a:solidFill>
+                  <a:srgbClr val="F4EFED"/>
+                </a:solidFill>
+                <a:latin typeface="Tahoma"/>
+                <a:ea typeface="Tahoma"/>
+                <a:cs typeface="Tahoma"/>
+                <a:sym typeface="Tahoma"/>
+              </a:rPr>
+              <a:t>สัปดาห์ที่ 5</a:t>
+            </a:r>
+            <a:endParaRPr b="0" i="0" sz="1400" u="none" cap="none" strike="noStrike">
+              <a:solidFill>
+                <a:schemeClr val="dk1"/>
+              </a:solidFill>
+              <a:latin typeface="Calibri"/>
+              <a:ea typeface="Calibri"/>
+              <a:cs typeface="Calibri"/>
+              <a:sym typeface="Calibri"/>
+            </a:endParaRPr>
+          </a:p>
+        </p:txBody>
+      </p:sp>
+      <p:sp>
+        <p:nvSpPr>
+          <p:cNvPr id="106" name="Google Shape;100;p6"/>
+          <p:cNvSpPr txBox="1"/>
+          <p:nvPr/>
+        </p:nvSpPr>
+        <p:spPr>
+          <a:xfrm>
+            <a:off x="1325880" y="5925312"/>
+            <a:ext cx="2011680" cy="320040"/>
+          </a:xfrm>
+          <a:prstGeom prst="rect">
+            <a:avLst/>
+          </a:prstGeom>
+          <a:noFill/>
+          <a:ln>
+            <a:noFill/>
+          </a:ln>
+        </p:spPr>
+        <p:txBody>
+          <a:bodyPr anchorCtr="0" anchor="ctr" bIns="0" lIns="0" spcFirstLastPara="1" rIns="0" wrap="square" tIns="0">
+            <a:noAutofit/>
+          </a:bodyPr>
+          <a:lstStyle/>
+          <a:p>
+            <a:pPr indent="0" lvl="0" marL="0" marR="0" rtl="0" algn="l">
+              <a:spcBef>
+                <a:spcPts val="0"/>
+              </a:spcBef>
+              <a:spcAft>
+                <a:spcPts val="0"/>
+              </a:spcAft>
+              <a:buClr>
+                <a:srgbClr val="D9A441"/>
+              </a:buClr>
+              <a:buSzPts val="1050"/>
+              <a:buFont typeface="Tahoma"/>
+              <a:buNone/>
+            </a:pPr>
+            <a:r>
+              <a:rPr b="0" i="0" lang="en-US" sz="1050" u="none" cap="none" strike="noStrike">
+                <a:solidFill>
+                  <a:srgbClr val="D9A441"/>
+                </a:solidFill>
+                <a:latin typeface="Tahoma"/>
+                <a:ea typeface="Tahoma"/>
+                <a:cs typeface="Tahoma"/>
+                <a:sym typeface="Tahoma"/>
+              </a:rPr>
+              <a:t>21 – 27 ก.ย.</a:t>
+            </a:r>
+            <a:endParaRPr b="0" i="0" sz="1050" u="none" cap="none" strike="noStrike">
+              <a:solidFill>
+                <a:schemeClr val="dk1"/>
+              </a:solidFill>
+              <a:latin typeface="Calibri"/>
+              <a:ea typeface="Calibri"/>
+              <a:cs typeface="Calibri"/>
+              <a:sym typeface="Calibri"/>
+            </a:endParaRPr>
+          </a:p>
+        </p:txBody>
+      </p:sp>
+      <p:sp>
+        <p:nvSpPr>
+          <p:cNvPr id="107" name="Google Shape;101;p6"/>
+          <p:cNvSpPr txBox="1"/>
+          <p:nvPr/>
+        </p:nvSpPr>
+        <p:spPr>
+          <a:xfrm>
+            <a:off x="3474720" y="5605272"/>
+            <a:ext cx="7863840" cy="640080"/>
+          </a:xfrm>
+          <a:prstGeom prst="rect">
+            <a:avLst/>
+          </a:prstGeom>
+          <a:noFill/>
+          <a:ln>
+            <a:noFill/>
+          </a:ln>
+        </p:spPr>
+        <p:txBody>
+          <a:bodyPr anchorCtr="0" anchor="ctr" bIns="0" lIns="0" spcFirstLastPara="1" rIns="0" wrap="square" tIns="0">
+            <a:noAutofit/>
+          </a:bodyPr>
+          <a:lstStyle/>
+          <a:p>
+            <a:pPr indent="0" lvl="0" marL="0" marR="0" rtl="0" algn="l">
+              <a:spcBef>
+                <a:spcPts val="0"/>
+              </a:spcBef>
+              <a:spcAft>
+                <a:spcPts val="0"/>
+              </a:spcAft>
+              <a:buClr>
+                <a:srgbClr val="9A8F8B"/>
+              </a:buClr>
+              <a:buSzPts val="1250"/>
+              <a:buFont typeface="Tahoma"/>
+              <a:buNone/>
+            </a:pPr>
+            <a:r>
+              <a:rPr b="0" i="0" lang="en-US" sz="1250" u="none" cap="none" strike="noStrike">
+                <a:solidFill>
+                  <a:srgbClr val="9A8F8B"/>
+                </a:solidFill>
+                <a:latin typeface="Tahoma"/>
+                <a:ea typeface="Tahoma"/>
+                <a:cs typeface="Tahoma"/>
+                <a:sym typeface="Tahoma"/>
+              </a:rPr>
+              <a:t>เมนูหลักใหม่ ห้องรอ เมนู Esc การตั้งค่า เสียงพูด 3D และวิทยุสื่อสาร</a:t>
             </a:r>
             <a:endParaRPr b="0" i="0" sz="1250" u="none" cap="none" strike="noStrike">
               <a:solidFill>
